--- a/cdk-global/CDK_Global_Databricks_Solution.pptx
+++ b/cdk-global/CDK_Global_Databricks_Solution.pptx
@@ -21,6 +21,7 @@
     <p:sldId id="269" r:id="rId20"/>
     <p:sldId id="270" r:id="rId21"/>
     <p:sldId id="271" r:id="rId22"/>
+    <p:sldId id="272" r:id="rId23"/>
   </p:sldIdLst>
   <p:sldSz cx="12191695" cy="6858000" type="screen4x3"/>
   <p:notesSz cx="6858000" cy="9144000"/>
@@ -3362,7 +3363,7 @@
               </a:defRPr>
             </a:pPr>
             <a:r>
-              <a:t>Breakout Sessions</a:t>
+              <a:t>Day 1: Welcome &amp; Platform Overview</a:t>
             </a:r>
           </a:p>
         </p:txBody>
@@ -3398,7 +3399,7 @@
               </a:defRPr>
             </a:pPr>
             <a:r>
-              <a:t>Hands-on schedule across three tracks</a:t>
+              <a:t>9:00 AM - 1:30 PM  |  Introductions, solution context, and Databricks platform deep dive</a:t>
             </a:r>
           </a:p>
         </p:txBody>
@@ -3513,121 +3514,13 @@
       </p:sp>
       <p:sp>
         <p:nvSpPr>
-          <p:cNvPr id="8" name="TextBox 7"/>
-          <p:cNvSpPr txBox="1"/>
-          <p:nvPr/>
-        </p:nvSpPr>
-        <p:spPr>
-          <a:xfrm>
-            <a:off x="731520" y="3200400"/>
-            <a:ext cx="1463040" cy="320040"/>
-          </a:xfrm>
-          <a:prstGeom prst="rect">
-            <a:avLst/>
-          </a:prstGeom>
-          <a:noFill/>
-        </p:spPr>
-        <p:txBody>
-          <a:bodyPr wrap="square">
-            <a:spAutoFit/>
-          </a:bodyPr>
-          <a:lstStyle/>
-          <a:p>
-            <a:pPr algn="l">
-              <a:defRPr sz="1200" b="1">
-                <a:solidFill>
-                  <a:srgbClr val="FFFFFF"/>
-                </a:solidFill>
-                <a:latin typeface="Calibri"/>
-              </a:defRPr>
-            </a:pPr>
-            <a:r>
-              <a:t>9:00 - 9:15</a:t>
-            </a:r>
-          </a:p>
-        </p:txBody>
-      </p:sp>
-      <p:sp>
-        <p:nvSpPr>
-          <p:cNvPr id="9" name="TextBox 8"/>
-          <p:cNvSpPr txBox="1"/>
-          <p:nvPr/>
-        </p:nvSpPr>
-        <p:spPr>
-          <a:xfrm>
-            <a:off x="2377440" y="3200400"/>
-            <a:ext cx="3840480" cy="320040"/>
-          </a:xfrm>
-          <a:prstGeom prst="rect">
-            <a:avLst/>
-          </a:prstGeom>
-          <a:noFill/>
-        </p:spPr>
-        <p:txBody>
-          <a:bodyPr wrap="square">
-            <a:spAutoFit/>
-          </a:bodyPr>
-          <a:lstStyle/>
-          <a:p>
-            <a:pPr algn="l">
-              <a:defRPr sz="1300" b="1">
-                <a:solidFill>
-                  <a:srgbClr val="FFFFFF"/>
-                </a:solidFill>
-                <a:latin typeface="Calibri"/>
-              </a:defRPr>
-            </a:pPr>
-            <a:r>
-              <a:t>Welcome &amp; Solution Overview</a:t>
-            </a:r>
-          </a:p>
-        </p:txBody>
-      </p:sp>
-      <p:sp>
-        <p:nvSpPr>
-          <p:cNvPr id="10" name="TextBox 9"/>
-          <p:cNvSpPr txBox="1"/>
-          <p:nvPr/>
-        </p:nvSpPr>
-        <p:spPr>
-          <a:xfrm>
-            <a:off x="2377440" y="3474720"/>
-            <a:ext cx="3840480" cy="274320"/>
-          </a:xfrm>
-          <a:prstGeom prst="rect">
-            <a:avLst/>
-          </a:prstGeom>
-          <a:noFill/>
-        </p:spPr>
-        <p:txBody>
-          <a:bodyPr wrap="square">
-            <a:spAutoFit/>
-          </a:bodyPr>
-          <a:lstStyle/>
-          <a:p>
-            <a:pPr algn="l">
-              <a:defRPr sz="1100" b="0">
-                <a:solidFill>
-                  <a:srgbClr val="888888"/>
-                </a:solidFill>
-                <a:latin typeface="Calibri"/>
-              </a:defRPr>
-            </a:pPr>
-            <a:r>
-              <a:t>Track: All</a:t>
-            </a:r>
-          </a:p>
-        </p:txBody>
-      </p:sp>
-      <p:sp>
-        <p:nvSpPr>
-          <p:cNvPr id="11" name="Rounded Rectangle 10"/>
+          <p:cNvPr id="8" name="Rounded Rectangle 7"/>
           <p:cNvSpPr/>
           <p:nvPr/>
         </p:nvSpPr>
         <p:spPr>
           <a:xfrm>
-            <a:off x="457200" y="3685032"/>
+            <a:off x="457200" y="3154680"/>
             <a:ext cx="11247120" cy="960120"/>
           </a:xfrm>
           <a:prstGeom prst="roundRect">
@@ -3665,20 +3558,20 @@
       </p:sp>
       <p:sp>
         <p:nvSpPr>
-          <p:cNvPr id="12" name="Rectangle 11"/>
+          <p:cNvPr id="9" name="Rectangle 8"/>
           <p:cNvSpPr/>
           <p:nvPr/>
         </p:nvSpPr>
         <p:spPr>
           <a:xfrm>
-            <a:off x="594360" y="3776472"/>
+            <a:off x="594360" y="3246120"/>
             <a:ext cx="45720" cy="777240"/>
           </a:xfrm>
           <a:prstGeom prst="rect">
             <a:avLst/>
           </a:prstGeom>
           <a:solidFill>
-            <a:srgbClr val="42A5F5"/>
+            <a:srgbClr val="FFFFFF"/>
           </a:solidFill>
           <a:ln>
             <a:noFill/>
@@ -3708,13 +3601,13 @@
       </p:sp>
       <p:sp>
         <p:nvSpPr>
-          <p:cNvPr id="13" name="TextBox 12"/>
-          <p:cNvSpPr txBox="1"/>
-          <p:nvPr/>
-        </p:nvSpPr>
-        <p:spPr>
-          <a:xfrm>
-            <a:off x="731520" y="3730752"/>
+          <p:cNvPr id="10" name="TextBox 9"/>
+          <p:cNvSpPr txBox="1"/>
+          <p:nvPr/>
+        </p:nvSpPr>
+        <p:spPr>
+          <a:xfrm>
+            <a:off x="731520" y="3200400"/>
             <a:ext cx="1463040" cy="320040"/>
           </a:xfrm>
           <a:prstGeom prst="rect">
@@ -3737,20 +3630,20 @@
               </a:defRPr>
             </a:pPr>
             <a:r>
-              <a:t>9:15 - 10:00</a:t>
-            </a:r>
-          </a:p>
-        </p:txBody>
-      </p:sp>
-      <p:sp>
-        <p:nvSpPr>
-          <p:cNvPr id="14" name="TextBox 13"/>
-          <p:cNvSpPr txBox="1"/>
-          <p:nvPr/>
-        </p:nvSpPr>
-        <p:spPr>
-          <a:xfrm>
-            <a:off x="2377440" y="3730752"/>
+              <a:t>9:00 - 9:30</a:t>
+            </a:r>
+          </a:p>
+        </p:txBody>
+      </p:sp>
+      <p:sp>
+        <p:nvSpPr>
+          <p:cNvPr id="11" name="TextBox 10"/>
+          <p:cNvSpPr txBox="1"/>
+          <p:nvPr/>
+        </p:nvSpPr>
+        <p:spPr>
+          <a:xfrm>
+            <a:off x="2377440" y="3200400"/>
             <a:ext cx="3840480" cy="320040"/>
           </a:xfrm>
           <a:prstGeom prst="rect">
@@ -3767,26 +3660,26 @@
             <a:pPr algn="l">
               <a:defRPr sz="1300" b="1">
                 <a:solidFill>
-                  <a:srgbClr val="42A5F5"/>
-                </a:solidFill>
-                <a:latin typeface="Calibri"/>
-              </a:defRPr>
-            </a:pPr>
-            <a:r>
-              <a:t>Databricks Platform Overview</a:t>
-            </a:r>
-          </a:p>
-        </p:txBody>
-      </p:sp>
-      <p:sp>
-        <p:nvSpPr>
-          <p:cNvPr id="15" name="TextBox 14"/>
-          <p:cNvSpPr txBox="1"/>
-          <p:nvPr/>
-        </p:nvSpPr>
-        <p:spPr>
-          <a:xfrm>
-            <a:off x="2377440" y="4005072"/>
+                  <a:srgbClr val="FFFFFF"/>
+                </a:solidFill>
+                <a:latin typeface="Calibri"/>
+              </a:defRPr>
+            </a:pPr>
+            <a:r>
+              <a:t>Welcome &amp; Solution Overview</a:t>
+            </a:r>
+          </a:p>
+        </p:txBody>
+      </p:sp>
+      <p:sp>
+        <p:nvSpPr>
+          <p:cNvPr id="12" name="TextBox 11"/>
+          <p:cNvSpPr txBox="1"/>
+          <p:nvPr/>
+        </p:nvSpPr>
+        <p:spPr>
+          <a:xfrm>
+            <a:off x="2377440" y="3474720"/>
             <a:ext cx="3840480" cy="274320"/>
           </a:xfrm>
           <a:prstGeom prst="rect">
@@ -3809,20 +3702,20 @@
               </a:defRPr>
             </a:pPr>
             <a:r>
-              <a:t>Track: Platform</a:t>
-            </a:r>
-          </a:p>
-        </p:txBody>
-      </p:sp>
-      <p:sp>
-        <p:nvSpPr>
-          <p:cNvPr id="16" name="TextBox 15"/>
-          <p:cNvSpPr txBox="1"/>
-          <p:nvPr/>
-        </p:nvSpPr>
-        <p:spPr>
-          <a:xfrm>
-            <a:off x="6400800" y="3749040"/>
+              <a:t>Track: All</a:t>
+            </a:r>
+          </a:p>
+        </p:txBody>
+      </p:sp>
+      <p:sp>
+        <p:nvSpPr>
+          <p:cNvPr id="13" name="TextBox 12"/>
+          <p:cNvSpPr txBox="1"/>
+          <p:nvPr/>
+        </p:nvSpPr>
+        <p:spPr>
+          <a:xfrm>
+            <a:off x="6400800" y="3218688"/>
             <a:ext cx="5029200" cy="822960"/>
           </a:xfrm>
           <a:prstGeom prst="rect">
@@ -3845,100 +3738,28 @@
               </a:defRPr>
             </a:pPr>
             <a:r>
-              <a:t>Lakehouse Architecture  |  Unity Catalog</a:t>
+              <a:t>Introductions  |  Workshop Goals</a:t>
             </a:r>
             <a:br/>
             <a:r>
-              <a:t>Delta Lake  |  Serverless Compute</a:t>
+              <a:t>CDK Solution Architecture Walkthrough</a:t>
             </a:r>
             <a:br/>
             <a:r>
-              <a:t>Workspace, Clusters, SQL Warehouses</a:t>
-            </a:r>
-          </a:p>
-        </p:txBody>
-      </p:sp>
-      <p:sp>
-        <p:nvSpPr>
-          <p:cNvPr id="17" name="TextBox 16"/>
-          <p:cNvSpPr txBox="1"/>
-          <p:nvPr/>
-        </p:nvSpPr>
-        <p:spPr>
-          <a:xfrm>
-            <a:off x="731520" y="4672584"/>
-            <a:ext cx="1463040" cy="320040"/>
-          </a:xfrm>
-          <a:prstGeom prst="rect">
-            <a:avLst/>
-          </a:prstGeom>
-          <a:noFill/>
-        </p:spPr>
-        <p:txBody>
-          <a:bodyPr wrap="square">
-            <a:spAutoFit/>
-          </a:bodyPr>
-          <a:lstStyle/>
-          <a:p>
-            <a:pPr algn="l">
-              <a:defRPr sz="1200" b="0">
-                <a:solidFill>
-                  <a:srgbClr val="BBBBBB"/>
-                </a:solidFill>
-                <a:latin typeface="Calibri"/>
-              </a:defRPr>
-            </a:pPr>
-            <a:r>
-              <a:t>10:00 - 10:15</a:t>
-            </a:r>
-          </a:p>
-        </p:txBody>
-      </p:sp>
-      <p:sp>
-        <p:nvSpPr>
-          <p:cNvPr id="18" name="TextBox 17"/>
-          <p:cNvSpPr txBox="1"/>
-          <p:nvPr/>
-        </p:nvSpPr>
-        <p:spPr>
-          <a:xfrm>
-            <a:off x="2377440" y="4672584"/>
-            <a:ext cx="3840480" cy="320040"/>
-          </a:xfrm>
-          <a:prstGeom prst="rect">
-            <a:avLst/>
-          </a:prstGeom>
-          <a:noFill/>
-        </p:spPr>
-        <p:txBody>
-          <a:bodyPr wrap="square">
-            <a:spAutoFit/>
-          </a:bodyPr>
-          <a:lstStyle/>
-          <a:p>
-            <a:pPr algn="l">
-              <a:defRPr sz="1100" b="0">
-                <a:solidFill>
-                  <a:srgbClr val="888888"/>
-                </a:solidFill>
-                <a:latin typeface="Calibri"/>
-              </a:defRPr>
-            </a:pPr>
-            <a:r>
-              <a:t>Break</a:t>
-            </a:r>
-          </a:p>
-        </p:txBody>
-      </p:sp>
-      <p:sp>
-        <p:nvSpPr>
-          <p:cNvPr id="19" name="Rounded Rectangle 18"/>
+              <a:t>End-to-end demo preview</a:t>
+            </a:r>
+          </a:p>
+        </p:txBody>
+      </p:sp>
+      <p:sp>
+        <p:nvSpPr>
+          <p:cNvPr id="14" name="Rounded Rectangle 13"/>
           <p:cNvSpPr/>
           <p:nvPr/>
         </p:nvSpPr>
         <p:spPr>
           <a:xfrm>
-            <a:off x="457200" y="5020056"/>
+            <a:off x="457200" y="4096512"/>
             <a:ext cx="11247120" cy="960120"/>
           </a:xfrm>
           <a:prstGeom prst="roundRect">
@@ -3976,20 +3797,20 @@
       </p:sp>
       <p:sp>
         <p:nvSpPr>
-          <p:cNvPr id="20" name="Rectangle 19"/>
+          <p:cNvPr id="15" name="Rectangle 14"/>
           <p:cNvSpPr/>
           <p:nvPr/>
         </p:nvSpPr>
         <p:spPr>
           <a:xfrm>
-            <a:off x="594360" y="5111496"/>
+            <a:off x="594360" y="4187952"/>
             <a:ext cx="45720" cy="777240"/>
           </a:xfrm>
           <a:prstGeom prst="rect">
             <a:avLst/>
           </a:prstGeom>
           <a:solidFill>
-            <a:srgbClr val="FF3821"/>
+            <a:srgbClr val="42A5F5"/>
           </a:solidFill>
           <a:ln>
             <a:noFill/>
@@ -4019,13 +3840,13 @@
       </p:sp>
       <p:sp>
         <p:nvSpPr>
-          <p:cNvPr id="21" name="TextBox 20"/>
-          <p:cNvSpPr txBox="1"/>
-          <p:nvPr/>
-        </p:nvSpPr>
-        <p:spPr>
-          <a:xfrm>
-            <a:off x="731520" y="5065776"/>
+          <p:cNvPr id="16" name="TextBox 15"/>
+          <p:cNvSpPr txBox="1"/>
+          <p:nvPr/>
+        </p:nvSpPr>
+        <p:spPr>
+          <a:xfrm>
+            <a:off x="731520" y="4142232"/>
             <a:ext cx="1463040" cy="320040"/>
           </a:xfrm>
           <a:prstGeom prst="rect">
@@ -4048,20 +3869,20 @@
               </a:defRPr>
             </a:pPr>
             <a:r>
-              <a:t>10:15 - 11:15</a:t>
-            </a:r>
-          </a:p>
-        </p:txBody>
-      </p:sp>
-      <p:sp>
-        <p:nvSpPr>
-          <p:cNvPr id="22" name="TextBox 21"/>
-          <p:cNvSpPr txBox="1"/>
-          <p:nvPr/>
-        </p:nvSpPr>
-        <p:spPr>
-          <a:xfrm>
-            <a:off x="2377440" y="5065776"/>
+              <a:t>9:30 - 10:45</a:t>
+            </a:r>
+          </a:p>
+        </p:txBody>
+      </p:sp>
+      <p:sp>
+        <p:nvSpPr>
+          <p:cNvPr id="17" name="TextBox 16"/>
+          <p:cNvSpPr txBox="1"/>
+          <p:nvPr/>
+        </p:nvSpPr>
+        <p:spPr>
+          <a:xfrm>
+            <a:off x="2377440" y="4142232"/>
             <a:ext cx="3840480" cy="320040"/>
           </a:xfrm>
           <a:prstGeom prst="rect">
@@ -4078,26 +3899,26 @@
             <a:pPr algn="l">
               <a:defRPr sz="1300" b="1">
                 <a:solidFill>
-                  <a:srgbClr val="FF3821"/>
-                </a:solidFill>
-                <a:latin typeface="Calibri"/>
-              </a:defRPr>
-            </a:pPr>
-            <a:r>
-              <a:t>Session 1: Data Engineering</a:t>
-            </a:r>
-          </a:p>
-        </p:txBody>
-      </p:sp>
-      <p:sp>
-        <p:nvSpPr>
-          <p:cNvPr id="23" name="TextBox 22"/>
-          <p:cNvSpPr txBox="1"/>
-          <p:nvPr/>
-        </p:nvSpPr>
-        <p:spPr>
-          <a:xfrm>
-            <a:off x="2377440" y="5340096"/>
+                  <a:srgbClr val="42A5F5"/>
+                </a:solidFill>
+                <a:latin typeface="Calibri"/>
+              </a:defRPr>
+            </a:pPr>
+            <a:r>
+              <a:t>Databricks Platform Overview</a:t>
+            </a:r>
+          </a:p>
+        </p:txBody>
+      </p:sp>
+      <p:sp>
+        <p:nvSpPr>
+          <p:cNvPr id="18" name="TextBox 17"/>
+          <p:cNvSpPr txBox="1"/>
+          <p:nvPr/>
+        </p:nvSpPr>
+        <p:spPr>
+          <a:xfrm>
+            <a:off x="2377440" y="4416552"/>
             <a:ext cx="3840480" cy="274320"/>
           </a:xfrm>
           <a:prstGeom prst="rect">
@@ -4120,20 +3941,20 @@
               </a:defRPr>
             </a:pPr>
             <a:r>
-              <a:t>Track: Data Pipelines</a:t>
-            </a:r>
-          </a:p>
-        </p:txBody>
-      </p:sp>
-      <p:sp>
-        <p:nvSpPr>
-          <p:cNvPr id="24" name="TextBox 23"/>
-          <p:cNvSpPr txBox="1"/>
-          <p:nvPr/>
-        </p:nvSpPr>
-        <p:spPr>
-          <a:xfrm>
-            <a:off x="6400800" y="5084064"/>
+              <a:t>Track: Platform</a:t>
+            </a:r>
+          </a:p>
+        </p:txBody>
+      </p:sp>
+      <p:sp>
+        <p:nvSpPr>
+          <p:cNvPr id="19" name="TextBox 18"/>
+          <p:cNvSpPr txBox="1"/>
+          <p:nvPr/>
+        </p:nvSpPr>
+        <p:spPr>
+          <a:xfrm>
+            <a:off x="6400800" y="4160520"/>
             <a:ext cx="5029200" cy="822960"/>
           </a:xfrm>
           <a:prstGeom prst="rect">
@@ -4156,28 +3977,28 @@
               </a:defRPr>
             </a:pPr>
             <a:r>
-              <a:t>Auto Loader  |  Document AI (ai_parse_document)</a:t>
+              <a:t>Lakehouse Architecture  |  Unity Catalog</a:t>
             </a:r>
             <a:br/>
             <a:r>
-              <a:t>SDP Pipeline: Bronze / Silver / Gold</a:t>
+              <a:t>Delta Lake  |  Serverless Compute</a:t>
             </a:r>
             <a:br/>
             <a:r>
-              <a:t>3-way join on application_id</a:t>
-            </a:r>
-          </a:p>
-        </p:txBody>
-      </p:sp>
-      <p:sp>
-        <p:nvSpPr>
-          <p:cNvPr id="25" name="TextBox 24"/>
-          <p:cNvSpPr txBox="1"/>
-          <p:nvPr/>
-        </p:nvSpPr>
-        <p:spPr>
-          <a:xfrm>
-            <a:off x="731520" y="6007608"/>
+              <a:t>Workspace, Clusters, SQL Warehouses</a:t>
+            </a:r>
+          </a:p>
+        </p:txBody>
+      </p:sp>
+      <p:sp>
+        <p:nvSpPr>
+          <p:cNvPr id="20" name="TextBox 19"/>
+          <p:cNvSpPr txBox="1"/>
+          <p:nvPr/>
+        </p:nvSpPr>
+        <p:spPr>
+          <a:xfrm>
+            <a:off x="731520" y="5084064"/>
             <a:ext cx="1463040" cy="320040"/>
           </a:xfrm>
           <a:prstGeom prst="rect">
@@ -4200,20 +4021,20 @@
               </a:defRPr>
             </a:pPr>
             <a:r>
-              <a:t>11:15 - 11:30</a:t>
-            </a:r>
-          </a:p>
-        </p:txBody>
-      </p:sp>
-      <p:sp>
-        <p:nvSpPr>
-          <p:cNvPr id="26" name="TextBox 25"/>
-          <p:cNvSpPr txBox="1"/>
-          <p:nvPr/>
-        </p:nvSpPr>
-        <p:spPr>
-          <a:xfrm>
-            <a:off x="2377440" y="6007608"/>
+              <a:t>10:45 - 11:00</a:t>
+            </a:r>
+          </a:p>
+        </p:txBody>
+      </p:sp>
+      <p:sp>
+        <p:nvSpPr>
+          <p:cNvPr id="21" name="TextBox 20"/>
+          <p:cNvSpPr txBox="1"/>
+          <p:nvPr/>
+        </p:nvSpPr>
+        <p:spPr>
+          <a:xfrm>
+            <a:off x="2377440" y="5084064"/>
             <a:ext cx="3840480" cy="320040"/>
           </a:xfrm>
           <a:prstGeom prst="rect">
@@ -4243,13 +4064,13 @@
       </p:sp>
       <p:sp>
         <p:nvSpPr>
-          <p:cNvPr id="27" name="Rounded Rectangle 26"/>
+          <p:cNvPr id="22" name="Rounded Rectangle 21"/>
           <p:cNvSpPr/>
           <p:nvPr/>
         </p:nvSpPr>
         <p:spPr>
           <a:xfrm>
-            <a:off x="457200" y="6355080"/>
+            <a:off x="457200" y="5431536"/>
             <a:ext cx="11247120" cy="960120"/>
           </a:xfrm>
           <a:prstGeom prst="roundRect">
@@ -4287,20 +4108,20 @@
       </p:sp>
       <p:sp>
         <p:nvSpPr>
-          <p:cNvPr id="28" name="Rectangle 27"/>
+          <p:cNvPr id="23" name="Rectangle 22"/>
           <p:cNvSpPr/>
           <p:nvPr/>
         </p:nvSpPr>
         <p:spPr>
           <a:xfrm>
-            <a:off x="594360" y="6446520"/>
+            <a:off x="594360" y="5522976"/>
             <a:ext cx="45720" cy="777240"/>
           </a:xfrm>
           <a:prstGeom prst="rect">
             <a:avLst/>
           </a:prstGeom>
           <a:solidFill>
-            <a:srgbClr val="FFB72B"/>
+            <a:srgbClr val="42A5F5"/>
           </a:solidFill>
           <a:ln>
             <a:noFill/>
@@ -4330,13 +4151,13 @@
       </p:sp>
       <p:sp>
         <p:nvSpPr>
-          <p:cNvPr id="29" name="TextBox 28"/>
-          <p:cNvSpPr txBox="1"/>
-          <p:nvPr/>
-        </p:nvSpPr>
-        <p:spPr>
-          <a:xfrm>
-            <a:off x="731520" y="6400800"/>
+          <p:cNvPr id="24" name="TextBox 23"/>
+          <p:cNvSpPr txBox="1"/>
+          <p:nvPr/>
+        </p:nvSpPr>
+        <p:spPr>
+          <a:xfrm>
+            <a:off x="731520" y="5477256"/>
             <a:ext cx="1463040" cy="320040"/>
           </a:xfrm>
           <a:prstGeom prst="rect">
@@ -4359,20 +4180,20 @@
               </a:defRPr>
             </a:pPr>
             <a:r>
-              <a:t>11:30 - 12:45</a:t>
-            </a:r>
-          </a:p>
-        </p:txBody>
-      </p:sp>
-      <p:sp>
-        <p:nvSpPr>
-          <p:cNvPr id="30" name="TextBox 29"/>
-          <p:cNvSpPr txBox="1"/>
-          <p:nvPr/>
-        </p:nvSpPr>
-        <p:spPr>
-          <a:xfrm>
-            <a:off x="2377440" y="6400800"/>
+              <a:t>11:00 - 12:15</a:t>
+            </a:r>
+          </a:p>
+        </p:txBody>
+      </p:sp>
+      <p:sp>
+        <p:nvSpPr>
+          <p:cNvPr id="25" name="TextBox 24"/>
+          <p:cNvSpPr txBox="1"/>
+          <p:nvPr/>
+        </p:nvSpPr>
+        <p:spPr>
+          <a:xfrm>
+            <a:off x="2377440" y="5477256"/>
             <a:ext cx="3840480" cy="320040"/>
           </a:xfrm>
           <a:prstGeom prst="rect">
@@ -4389,26 +4210,26 @@
             <a:pPr algn="l">
               <a:defRPr sz="1300" b="1">
                 <a:solidFill>
-                  <a:srgbClr val="FFB72B"/>
-                </a:solidFill>
-                <a:latin typeface="Calibri"/>
-              </a:defRPr>
-            </a:pPr>
-            <a:r>
-              <a:t>Session 2: ML &amp; MLOps</a:t>
-            </a:r>
-          </a:p>
-        </p:txBody>
-      </p:sp>
-      <p:sp>
-        <p:nvSpPr>
-          <p:cNvPr id="31" name="TextBox 30"/>
-          <p:cNvSpPr txBox="1"/>
-          <p:nvPr/>
-        </p:nvSpPr>
-        <p:spPr>
-          <a:xfrm>
-            <a:off x="2377440" y="6675120"/>
+                  <a:srgbClr val="42A5F5"/>
+                </a:solidFill>
+                <a:latin typeface="Calibri"/>
+              </a:defRPr>
+            </a:pPr>
+            <a:r>
+              <a:t>Platform Deep Dive</a:t>
+            </a:r>
+          </a:p>
+        </p:txBody>
+      </p:sp>
+      <p:sp>
+        <p:nvSpPr>
+          <p:cNvPr id="26" name="TextBox 25"/>
+          <p:cNvSpPr txBox="1"/>
+          <p:nvPr/>
+        </p:nvSpPr>
+        <p:spPr>
+          <a:xfrm>
+            <a:off x="2377440" y="5751576"/>
             <a:ext cx="3840480" cy="274320"/>
           </a:xfrm>
           <a:prstGeom prst="rect">
@@ -4431,20 +4252,20 @@
               </a:defRPr>
             </a:pPr>
             <a:r>
-              <a:t>Track: ML / MLOps</a:t>
-            </a:r>
-          </a:p>
-        </p:txBody>
-      </p:sp>
-      <p:sp>
-        <p:nvSpPr>
-          <p:cNvPr id="32" name="TextBox 31"/>
-          <p:cNvSpPr txBox="1"/>
-          <p:nvPr/>
-        </p:nvSpPr>
-        <p:spPr>
-          <a:xfrm>
-            <a:off x="6400800" y="6419088"/>
+              <a:t>Track: Platform</a:t>
+            </a:r>
+          </a:p>
+        </p:txBody>
+      </p:sp>
+      <p:sp>
+        <p:nvSpPr>
+          <p:cNvPr id="27" name="TextBox 26"/>
+          <p:cNvSpPr txBox="1"/>
+          <p:nvPr/>
+        </p:nvSpPr>
+        <p:spPr>
+          <a:xfrm>
+            <a:off x="6400800" y="5495544"/>
             <a:ext cx="5029200" cy="822960"/>
           </a:xfrm>
           <a:prstGeom prst="rect">
@@ -4467,28 +4288,32 @@
               </a:defRPr>
             </a:pPr>
             <a:r>
-              <a:t>Feature Engineering + UC Functions</a:t>
+              <a:t>Data Engineering: Auto Loader, SDP Pipelines</a:t>
             </a:r>
             <a:br/>
             <a:r>
-              <a:t>Optuna HPO + pyfunc wrapper with rules</a:t>
+              <a:t>SQL Analytics: Warehouses, Dashboards, Genie</a:t>
             </a:r>
             <a:br/>
             <a:r>
-              <a:t>Champion/Challenger  |  Serving  |  Monitoring</a:t>
-            </a:r>
-          </a:p>
-        </p:txBody>
-      </p:sp>
-      <p:sp>
-        <p:nvSpPr>
-          <p:cNvPr id="33" name="TextBox 32"/>
-          <p:cNvSpPr txBox="1"/>
-          <p:nvPr/>
-        </p:nvSpPr>
-        <p:spPr>
-          <a:xfrm>
-            <a:off x="731520" y="7342632"/>
+              <a:t>AI &amp; GenAI: Foundation Models, Vector Search</a:t>
+            </a:r>
+            <a:br/>
+            <a:r>
+              <a:t>Governance: Lineage, Row/Column Security</a:t>
+            </a:r>
+          </a:p>
+        </p:txBody>
+      </p:sp>
+      <p:sp>
+        <p:nvSpPr>
+          <p:cNvPr id="28" name="TextBox 27"/>
+          <p:cNvSpPr txBox="1"/>
+          <p:nvPr/>
+        </p:nvSpPr>
+        <p:spPr>
+          <a:xfrm>
+            <a:off x="731520" y="6419088"/>
             <a:ext cx="1463040" cy="320040"/>
           </a:xfrm>
           <a:prstGeom prst="rect">
@@ -4511,20 +4336,20 @@
               </a:defRPr>
             </a:pPr>
             <a:r>
-              <a:t>12:45 - 1:00</a:t>
-            </a:r>
-          </a:p>
-        </p:txBody>
-      </p:sp>
-      <p:sp>
-        <p:nvSpPr>
-          <p:cNvPr id="34" name="TextBox 33"/>
-          <p:cNvSpPr txBox="1"/>
-          <p:nvPr/>
-        </p:nvSpPr>
-        <p:spPr>
-          <a:xfrm>
-            <a:off x="2377440" y="7342632"/>
+              <a:t>12:15 - 12:45</a:t>
+            </a:r>
+          </a:p>
+        </p:txBody>
+      </p:sp>
+      <p:sp>
+        <p:nvSpPr>
+          <p:cNvPr id="29" name="TextBox 28"/>
+          <p:cNvSpPr txBox="1"/>
+          <p:nvPr/>
+        </p:nvSpPr>
+        <p:spPr>
+          <a:xfrm>
+            <a:off x="2377440" y="6419088"/>
             <a:ext cx="3840480" cy="320040"/>
           </a:xfrm>
           <a:prstGeom prst="rect">
@@ -4547,20 +4372,20 @@
               </a:defRPr>
             </a:pPr>
             <a:r>
-              <a:t>Break</a:t>
-            </a:r>
-          </a:p>
-        </p:txBody>
-      </p:sp>
-      <p:sp>
-        <p:nvSpPr>
-          <p:cNvPr id="35" name="Rounded Rectangle 34"/>
+              <a:t>Lunch</a:t>
+            </a:r>
+          </a:p>
+        </p:txBody>
+      </p:sp>
+      <p:sp>
+        <p:nvSpPr>
+          <p:cNvPr id="30" name="Rounded Rectangle 29"/>
           <p:cNvSpPr/>
           <p:nvPr/>
         </p:nvSpPr>
         <p:spPr>
           <a:xfrm>
-            <a:off x="457200" y="7690104"/>
+            <a:off x="457200" y="6766560"/>
             <a:ext cx="11247120" cy="960120"/>
           </a:xfrm>
           <a:prstGeom prst="roundRect">
@@ -4598,20 +4423,20 @@
       </p:sp>
       <p:sp>
         <p:nvSpPr>
-          <p:cNvPr id="36" name="Rectangle 35"/>
+          <p:cNvPr id="31" name="Rectangle 30"/>
           <p:cNvSpPr/>
           <p:nvPr/>
         </p:nvSpPr>
         <p:spPr>
           <a:xfrm>
-            <a:off x="594360" y="7781544"/>
+            <a:off x="594360" y="6858000"/>
             <a:ext cx="45720" cy="777240"/>
           </a:xfrm>
           <a:prstGeom prst="rect">
             <a:avLst/>
           </a:prstGeom>
           <a:solidFill>
-            <a:srgbClr val="00C853"/>
+            <a:srgbClr val="42A5F5"/>
           </a:solidFill>
           <a:ln>
             <a:noFill/>
@@ -4641,13 +4466,13 @@
       </p:sp>
       <p:sp>
         <p:nvSpPr>
-          <p:cNvPr id="37" name="TextBox 36"/>
-          <p:cNvSpPr txBox="1"/>
-          <p:nvPr/>
-        </p:nvSpPr>
-        <p:spPr>
-          <a:xfrm>
-            <a:off x="731520" y="7735824"/>
+          <p:cNvPr id="32" name="TextBox 31"/>
+          <p:cNvSpPr txBox="1"/>
+          <p:nvPr/>
+        </p:nvSpPr>
+        <p:spPr>
+          <a:xfrm>
+            <a:off x="731520" y="6812280"/>
             <a:ext cx="1463040" cy="320040"/>
           </a:xfrm>
           <a:prstGeom prst="rect">
@@ -4670,20 +4495,20 @@
               </a:defRPr>
             </a:pPr>
             <a:r>
-              <a:t>1:00 - 2:00</a:t>
-            </a:r>
-          </a:p>
-        </p:txBody>
-      </p:sp>
-      <p:sp>
-        <p:nvSpPr>
-          <p:cNvPr id="38" name="TextBox 37"/>
-          <p:cNvSpPr txBox="1"/>
-          <p:nvPr/>
-        </p:nvSpPr>
-        <p:spPr>
-          <a:xfrm>
-            <a:off x="2377440" y="7735824"/>
+              <a:t>12:45 - 1:30</a:t>
+            </a:r>
+          </a:p>
+        </p:txBody>
+      </p:sp>
+      <p:sp>
+        <p:nvSpPr>
+          <p:cNvPr id="33" name="TextBox 32"/>
+          <p:cNvSpPr txBox="1"/>
+          <p:nvPr/>
+        </p:nvSpPr>
+        <p:spPr>
+          <a:xfrm>
+            <a:off x="2377440" y="6812280"/>
             <a:ext cx="3840480" cy="320040"/>
           </a:xfrm>
           <a:prstGeom prst="rect">
@@ -4700,26 +4525,26 @@
             <a:pPr algn="l">
               <a:defRPr sz="1300" b="1">
                 <a:solidFill>
-                  <a:srgbClr val="00C853"/>
-                </a:solidFill>
-                <a:latin typeface="Calibri"/>
-              </a:defRPr>
-            </a:pPr>
-            <a:r>
-              <a:t>Session 3: AI &amp; Agent Bricks</a:t>
-            </a:r>
-          </a:p>
-        </p:txBody>
-      </p:sp>
-      <p:sp>
-        <p:nvSpPr>
-          <p:cNvPr id="39" name="TextBox 38"/>
-          <p:cNvSpPr txBox="1"/>
-          <p:nvPr/>
-        </p:nvSpPr>
-        <p:spPr>
-          <a:xfrm>
-            <a:off x="2377440" y="8010144"/>
+                  <a:srgbClr val="42A5F5"/>
+                </a:solidFill>
+                <a:latin typeface="Calibri"/>
+              </a:defRPr>
+            </a:pPr>
+            <a:r>
+              <a:t>Platform Hands-On &amp; Q&amp;A</a:t>
+            </a:r>
+          </a:p>
+        </p:txBody>
+      </p:sp>
+      <p:sp>
+        <p:nvSpPr>
+          <p:cNvPr id="34" name="TextBox 33"/>
+          <p:cNvSpPr txBox="1"/>
+          <p:nvPr/>
+        </p:nvSpPr>
+        <p:spPr>
+          <a:xfrm>
+            <a:off x="2377440" y="7086600"/>
             <a:ext cx="3840480" cy="274320"/>
           </a:xfrm>
           <a:prstGeom prst="rect">
@@ -4742,20 +4567,20 @@
               </a:defRPr>
             </a:pPr>
             <a:r>
-              <a:t>Track: AI</a:t>
-            </a:r>
-          </a:p>
-        </p:txBody>
-      </p:sp>
-      <p:sp>
-        <p:nvSpPr>
-          <p:cNvPr id="40" name="TextBox 39"/>
-          <p:cNvSpPr txBox="1"/>
-          <p:nvPr/>
-        </p:nvSpPr>
-        <p:spPr>
-          <a:xfrm>
-            <a:off x="6400800" y="7754112"/>
+              <a:t>Track: Platform</a:t>
+            </a:r>
+          </a:p>
+        </p:txBody>
+      </p:sp>
+      <p:sp>
+        <p:nvSpPr>
+          <p:cNvPr id="35" name="TextBox 34"/>
+          <p:cNvSpPr txBox="1"/>
+          <p:nvPr/>
+        </p:nvSpPr>
+        <p:spPr>
+          <a:xfrm>
+            <a:off x="6400800" y="6830568"/>
             <a:ext cx="5029200" cy="822960"/>
           </a:xfrm>
           <a:prstGeom prst="rect">
@@ -4778,123 +4603,15 @@
               </a:defRPr>
             </a:pPr>
             <a:r>
-              <a:t>Lender Shopping Agent (ResponsesAgent)</a:t>
+              <a:t>Live platform walkthrough</a:t>
             </a:r>
             <a:br/>
             <a:r>
-              <a:t>Genie Space for self-service analytics</a:t>
+              <a:t>Workspace navigation &amp; notebooks</a:t>
             </a:r>
             <a:br/>
             <a:r>
-              <a:t>Multi-Agent Supervisor orchestration</a:t>
-            </a:r>
-          </a:p>
-        </p:txBody>
-      </p:sp>
-      <p:sp>
-        <p:nvSpPr>
-          <p:cNvPr id="41" name="TextBox 40"/>
-          <p:cNvSpPr txBox="1"/>
-          <p:nvPr/>
-        </p:nvSpPr>
-        <p:spPr>
-          <a:xfrm>
-            <a:off x="731520" y="8677656"/>
-            <a:ext cx="1463040" cy="320040"/>
-          </a:xfrm>
-          <a:prstGeom prst="rect">
-            <a:avLst/>
-          </a:prstGeom>
-          <a:noFill/>
-        </p:spPr>
-        <p:txBody>
-          <a:bodyPr wrap="square">
-            <a:spAutoFit/>
-          </a:bodyPr>
-          <a:lstStyle/>
-          <a:p>
-            <a:pPr algn="l">
-              <a:defRPr sz="1200" b="1">
-                <a:solidFill>
-                  <a:srgbClr val="FFFFFF"/>
-                </a:solidFill>
-                <a:latin typeface="Calibri"/>
-              </a:defRPr>
-            </a:pPr>
-            <a:r>
-              <a:t>2:00 - 2:30</a:t>
-            </a:r>
-          </a:p>
-        </p:txBody>
-      </p:sp>
-      <p:sp>
-        <p:nvSpPr>
-          <p:cNvPr id="42" name="TextBox 41"/>
-          <p:cNvSpPr txBox="1"/>
-          <p:nvPr/>
-        </p:nvSpPr>
-        <p:spPr>
-          <a:xfrm>
-            <a:off x="2377440" y="8677656"/>
-            <a:ext cx="3840480" cy="320040"/>
-          </a:xfrm>
-          <a:prstGeom prst="rect">
-            <a:avLst/>
-          </a:prstGeom>
-          <a:noFill/>
-        </p:spPr>
-        <p:txBody>
-          <a:bodyPr wrap="square">
-            <a:spAutoFit/>
-          </a:bodyPr>
-          <a:lstStyle/>
-          <a:p>
-            <a:pPr algn="l">
-              <a:defRPr sz="1300" b="1">
-                <a:solidFill>
-                  <a:srgbClr val="FFFFFF"/>
-                </a:solidFill>
-                <a:latin typeface="Calibri"/>
-              </a:defRPr>
-            </a:pPr>
-            <a:r>
-              <a:t>Conclusion &amp; Next Steps</a:t>
-            </a:r>
-          </a:p>
-        </p:txBody>
-      </p:sp>
-      <p:sp>
-        <p:nvSpPr>
-          <p:cNvPr id="43" name="TextBox 42"/>
-          <p:cNvSpPr txBox="1"/>
-          <p:nvPr/>
-        </p:nvSpPr>
-        <p:spPr>
-          <a:xfrm>
-            <a:off x="2377440" y="8951976"/>
-            <a:ext cx="3840480" cy="274320"/>
-          </a:xfrm>
-          <a:prstGeom prst="rect">
-            <a:avLst/>
-          </a:prstGeom>
-          <a:noFill/>
-        </p:spPr>
-        <p:txBody>
-          <a:bodyPr wrap="square">
-            <a:spAutoFit/>
-          </a:bodyPr>
-          <a:lstStyle/>
-          <a:p>
-            <a:pPr algn="l">
-              <a:defRPr sz="1100" b="0">
-                <a:solidFill>
-                  <a:srgbClr val="888888"/>
-                </a:solidFill>
-                <a:latin typeface="Calibri"/>
-              </a:defRPr>
-            </a:pPr>
-            <a:r>
-              <a:t>Track: All</a:t>
+              <a:t>Unity Catalog exploration</a:t>
             </a:r>
           </a:p>
         </p:txBody>
@@ -4999,7 +4716,7 @@
               </a:defRPr>
             </a:pPr>
             <a:r>
-              <a:t>Databricks Platform Overview</a:t>
+              <a:t>Day 2: Hands-On Breakout Sessions</a:t>
             </a:r>
           </a:p>
         </p:txBody>
@@ -5035,21 +4752,129 @@
               </a:defRPr>
             </a:pPr>
             <a:r>
-              <a:t>A unified analytics platform for data, AI, and governance  |  45 min</a:t>
-            </a:r>
-          </a:p>
-        </p:txBody>
-      </p:sp>
-      <p:sp>
-        <p:nvSpPr>
-          <p:cNvPr id="5" name="Rounded Rectangle 4"/>
+              <a:t>9:00 AM - 1:00 PM  |  AI Engineering, Data Engineering, ML &amp; MLOps/LLMOps</a:t>
+            </a:r>
+          </a:p>
+        </p:txBody>
+      </p:sp>
+      <p:sp>
+        <p:nvSpPr>
+          <p:cNvPr id="5" name="TextBox 4"/>
+          <p:cNvSpPr txBox="1"/>
+          <p:nvPr/>
+        </p:nvSpPr>
+        <p:spPr>
+          <a:xfrm>
+            <a:off x="548640" y="2834640"/>
+            <a:ext cx="1645920" cy="365760"/>
+          </a:xfrm>
+          <a:prstGeom prst="rect">
+            <a:avLst/>
+          </a:prstGeom>
+          <a:noFill/>
+        </p:spPr>
+        <p:txBody>
+          <a:bodyPr wrap="square">
+            <a:spAutoFit/>
+          </a:bodyPr>
+          <a:lstStyle/>
+          <a:p>
+            <a:pPr algn="l">
+              <a:defRPr sz="1300" b="1">
+                <a:solidFill>
+                  <a:srgbClr val="888888"/>
+                </a:solidFill>
+                <a:latin typeface="Calibri"/>
+              </a:defRPr>
+            </a:pPr>
+            <a:r>
+              <a:t>Time</a:t>
+            </a:r>
+          </a:p>
+        </p:txBody>
+      </p:sp>
+      <p:sp>
+        <p:nvSpPr>
+          <p:cNvPr id="6" name="TextBox 5"/>
+          <p:cNvSpPr txBox="1"/>
+          <p:nvPr/>
+        </p:nvSpPr>
+        <p:spPr>
+          <a:xfrm>
+            <a:off x="2377440" y="2834640"/>
+            <a:ext cx="3840480" cy="365760"/>
+          </a:xfrm>
+          <a:prstGeom prst="rect">
+            <a:avLst/>
+          </a:prstGeom>
+          <a:noFill/>
+        </p:spPr>
+        <p:txBody>
+          <a:bodyPr wrap="square">
+            <a:spAutoFit/>
+          </a:bodyPr>
+          <a:lstStyle/>
+          <a:p>
+            <a:pPr algn="l">
+              <a:defRPr sz="1300" b="1">
+                <a:solidFill>
+                  <a:srgbClr val="888888"/>
+                </a:solidFill>
+                <a:latin typeface="Calibri"/>
+              </a:defRPr>
+            </a:pPr>
+            <a:r>
+              <a:t>Session</a:t>
+            </a:r>
+          </a:p>
+        </p:txBody>
+      </p:sp>
+      <p:sp>
+        <p:nvSpPr>
+          <p:cNvPr id="7" name="TextBox 6"/>
+          <p:cNvSpPr txBox="1"/>
+          <p:nvPr/>
+        </p:nvSpPr>
+        <p:spPr>
+          <a:xfrm>
+            <a:off x="6400800" y="2834640"/>
+            <a:ext cx="5029200" cy="365760"/>
+          </a:xfrm>
+          <a:prstGeom prst="rect">
+            <a:avLst/>
+          </a:prstGeom>
+          <a:noFill/>
+        </p:spPr>
+        <p:txBody>
+          <a:bodyPr wrap="square">
+            <a:spAutoFit/>
+          </a:bodyPr>
+          <a:lstStyle/>
+          <a:p>
+            <a:pPr algn="l">
+              <a:defRPr sz="1300" b="1">
+                <a:solidFill>
+                  <a:srgbClr val="888888"/>
+                </a:solidFill>
+                <a:latin typeface="Calibri"/>
+              </a:defRPr>
+            </a:pPr>
+            <a:r>
+              <a:t>Key Topics</a:t>
+            </a:r>
+          </a:p>
+        </p:txBody>
+      </p:sp>
+      <p:sp>
+        <p:nvSpPr>
+          <p:cNvPr id="8" name="Rounded Rectangle 7"/>
           <p:cNvSpPr/>
           <p:nvPr/>
         </p:nvSpPr>
         <p:spPr>
           <a:xfrm>
-            <a:off x="548640" y="2926080"/>
-            <a:ext cx="5303520" cy="3474720"/>
+            <a:off x="457200" y="3154680"/>
+            <a:ext cx="11247120" cy="960120"/>
           </a:xfrm>
           <a:prstGeom prst="roundRect">
             <a:avLst/>
@@ -5086,20 +4911,20 @@
       </p:sp>
       <p:sp>
         <p:nvSpPr>
-          <p:cNvPr id="6" name="Rectangle 5"/>
+          <p:cNvPr id="9" name="Rectangle 8"/>
           <p:cNvSpPr/>
           <p:nvPr/>
         </p:nvSpPr>
         <p:spPr>
           <a:xfrm>
-            <a:off x="731520" y="3063240"/>
-            <a:ext cx="45720" cy="457200"/>
+            <a:off x="594360" y="3246120"/>
+            <a:ext cx="45720" cy="777240"/>
           </a:xfrm>
           <a:prstGeom prst="rect">
             <a:avLst/>
           </a:prstGeom>
           <a:solidFill>
-            <a:srgbClr val="42A5F5"/>
+            <a:srgbClr val="00C853"/>
           </a:solidFill>
           <a:ln>
             <a:noFill/>
@@ -5129,14 +4954,14 @@
       </p:sp>
       <p:sp>
         <p:nvSpPr>
-          <p:cNvPr id="7" name="TextBox 6"/>
-          <p:cNvSpPr txBox="1"/>
-          <p:nvPr/>
-        </p:nvSpPr>
-        <p:spPr>
-          <a:xfrm>
-            <a:off x="960120" y="3017520"/>
-            <a:ext cx="4663440" cy="457200"/>
+          <p:cNvPr id="10" name="TextBox 9"/>
+          <p:cNvSpPr txBox="1"/>
+          <p:nvPr/>
+        </p:nvSpPr>
+        <p:spPr>
+          <a:xfrm>
+            <a:off x="731520" y="3200400"/>
+            <a:ext cx="1463040" cy="320040"/>
           </a:xfrm>
           <a:prstGeom prst="rect">
             <a:avLst/>
@@ -5150,164 +4975,217 @@
           <a:lstStyle/>
           <a:p>
             <a:pPr algn="l">
-              <a:defRPr sz="1800" b="1">
-                <a:solidFill>
-                  <a:srgbClr val="42A5F5"/>
-                </a:solidFill>
-                <a:latin typeface="Calibri"/>
-              </a:defRPr>
-            </a:pPr>
-            <a:r>
-              <a:t>Lakehouse Architecture</a:t>
-            </a:r>
-          </a:p>
-        </p:txBody>
-      </p:sp>
-      <p:sp>
-        <p:nvSpPr>
-          <p:cNvPr id="8" name="TextBox 7"/>
-          <p:cNvSpPr txBox="1"/>
-          <p:nvPr/>
-        </p:nvSpPr>
-        <p:spPr>
-          <a:xfrm>
-            <a:off x="960120" y="3566160"/>
-            <a:ext cx="4663440" cy="2560320"/>
-          </a:xfrm>
-          <a:prstGeom prst="rect">
-            <a:avLst/>
-          </a:prstGeom>
-          <a:noFill/>
-        </p:spPr>
-        <p:txBody>
-          <a:bodyPr wrap="square">
-            <a:spAutoFit/>
-          </a:bodyPr>
-          <a:lstStyle/>
-          <a:p>
-            <a:pPr>
-              <a:spcAft>
-                <a:spcPts val="600"/>
-              </a:spcAft>
-              <a:defRPr sz="1300">
-                <a:solidFill>
-                  <a:srgbClr val="BBBBBB"/>
-                </a:solidFill>
-                <a:latin typeface="Calibri"/>
-              </a:defRPr>
-            </a:pPr>
-            <a:r>
-              <a:t>  Data Lakehouse: combines data lake + data warehouse</a:t>
-            </a:r>
-          </a:p>
-          <a:p>
-            <a:pPr>
-              <a:spcAft>
-                <a:spcPts val="600"/>
-              </a:spcAft>
-              <a:defRPr sz="1300">
-                <a:solidFill>
-                  <a:srgbClr val="BBBBBB"/>
-                </a:solidFill>
-                <a:latin typeface="Calibri"/>
-              </a:defRPr>
-            </a:pPr>
-            <a:r>
-              <a:t>  Delta Lake: ACID transactions, time travel, Z-order/Liquid Clustering</a:t>
-            </a:r>
-          </a:p>
-          <a:p>
-            <a:pPr>
-              <a:spcAft>
-                <a:spcPts val="600"/>
-              </a:spcAft>
-              <a:defRPr sz="1300">
-                <a:solidFill>
-                  <a:srgbClr val="BBBBBB"/>
-                </a:solidFill>
-                <a:latin typeface="Calibri"/>
-              </a:defRPr>
-            </a:pPr>
-            <a:r>
-              <a:t>  Unity Catalog: unified governance for tables, volumes, models, functions</a:t>
-            </a:r>
-          </a:p>
-          <a:p>
-            <a:pPr>
-              <a:spcAft>
-                <a:spcPts val="600"/>
-              </a:spcAft>
-              <a:defRPr sz="1300">
-                <a:solidFill>
-                  <a:srgbClr val="BBBBBB"/>
-                </a:solidFill>
-                <a:latin typeface="Calibri"/>
-              </a:defRPr>
-            </a:pPr>
-            <a:r>
-              <a:t>  Serverless compute: instant-on SQL warehouses &amp; job clusters</a:t>
-            </a:r>
-          </a:p>
-          <a:p>
-            <a:pPr>
-              <a:spcAft>
-                <a:spcPts val="600"/>
-              </a:spcAft>
-              <a:defRPr sz="1300">
-                <a:solidFill>
-                  <a:srgbClr val="BBBBBB"/>
-                </a:solidFill>
-                <a:latin typeface="Calibri"/>
-              </a:defRPr>
-            </a:pPr>
-            <a:r>
-              <a:t>  Workflows: orchestrate notebooks, pipelines, and jobs</a:t>
-            </a:r>
-          </a:p>
-          <a:p>
-            <a:pPr>
-              <a:spcAft>
-                <a:spcPts val="600"/>
-              </a:spcAft>
-              <a:defRPr sz="1300">
-                <a:solidFill>
-                  <a:srgbClr val="BBBBBB"/>
-                </a:solidFill>
-                <a:latin typeface="Calibri"/>
-              </a:defRPr>
-            </a:pPr>
-            <a:r>
-              <a:t>  Spark Declarative Pipelines: managed ETL (bronze/silver/gold)</a:t>
-            </a:r>
-          </a:p>
-          <a:p>
-            <a:pPr>
-              <a:spcAft>
-                <a:spcPts val="600"/>
-              </a:spcAft>
-              <a:defRPr sz="1300">
-                <a:solidFill>
-                  <a:srgbClr val="BBBBBB"/>
-                </a:solidFill>
-                <a:latin typeface="Calibri"/>
-              </a:defRPr>
-            </a:pPr>
-            <a:r>
-              <a:t>  Photon: vectorized query engine for fast SQL &amp; Spark</a:t>
-            </a:r>
-          </a:p>
-        </p:txBody>
-      </p:sp>
-      <p:sp>
-        <p:nvSpPr>
-          <p:cNvPr id="9" name="Rounded Rectangle 8"/>
+              <a:defRPr sz="1200" b="1">
+                <a:solidFill>
+                  <a:srgbClr val="FFFFFF"/>
+                </a:solidFill>
+                <a:latin typeface="Calibri"/>
+              </a:defRPr>
+            </a:pPr>
+            <a:r>
+              <a:t>9:00 - 10:15</a:t>
+            </a:r>
+          </a:p>
+        </p:txBody>
+      </p:sp>
+      <p:sp>
+        <p:nvSpPr>
+          <p:cNvPr id="11" name="TextBox 10"/>
+          <p:cNvSpPr txBox="1"/>
+          <p:nvPr/>
+        </p:nvSpPr>
+        <p:spPr>
+          <a:xfrm>
+            <a:off x="2377440" y="3200400"/>
+            <a:ext cx="3840480" cy="320040"/>
+          </a:xfrm>
+          <a:prstGeom prst="rect">
+            <a:avLst/>
+          </a:prstGeom>
+          <a:noFill/>
+        </p:spPr>
+        <p:txBody>
+          <a:bodyPr wrap="square">
+            <a:spAutoFit/>
+          </a:bodyPr>
+          <a:lstStyle/>
+          <a:p>
+            <a:pPr algn="l">
+              <a:defRPr sz="1300" b="1">
+                <a:solidFill>
+                  <a:srgbClr val="00C853"/>
+                </a:solidFill>
+                <a:latin typeface="Calibri"/>
+              </a:defRPr>
+            </a:pPr>
+            <a:r>
+              <a:t>AI Engineering</a:t>
+            </a:r>
+          </a:p>
+        </p:txBody>
+      </p:sp>
+      <p:sp>
+        <p:nvSpPr>
+          <p:cNvPr id="12" name="TextBox 11"/>
+          <p:cNvSpPr txBox="1"/>
+          <p:nvPr/>
+        </p:nvSpPr>
+        <p:spPr>
+          <a:xfrm>
+            <a:off x="2377440" y="3474720"/>
+            <a:ext cx="3840480" cy="274320"/>
+          </a:xfrm>
+          <a:prstGeom prst="rect">
+            <a:avLst/>
+          </a:prstGeom>
+          <a:noFill/>
+        </p:spPr>
+        <p:txBody>
+          <a:bodyPr wrap="square">
+            <a:spAutoFit/>
+          </a:bodyPr>
+          <a:lstStyle/>
+          <a:p>
+            <a:pPr algn="l">
+              <a:defRPr sz="1100" b="0">
+                <a:solidFill>
+                  <a:srgbClr val="888888"/>
+                </a:solidFill>
+                <a:latin typeface="Calibri"/>
+              </a:defRPr>
+            </a:pPr>
+            <a:r>
+              <a:t>Track: AI</a:t>
+            </a:r>
+          </a:p>
+        </p:txBody>
+      </p:sp>
+      <p:sp>
+        <p:nvSpPr>
+          <p:cNvPr id="13" name="TextBox 12"/>
+          <p:cNvSpPr txBox="1"/>
+          <p:nvPr/>
+        </p:nvSpPr>
+        <p:spPr>
+          <a:xfrm>
+            <a:off x="6400800" y="3218688"/>
+            <a:ext cx="5029200" cy="822960"/>
+          </a:xfrm>
+          <a:prstGeom prst="rect">
+            <a:avLst/>
+          </a:prstGeom>
+          <a:noFill/>
+        </p:spPr>
+        <p:txBody>
+          <a:bodyPr wrap="square">
+            <a:spAutoFit/>
+          </a:bodyPr>
+          <a:lstStyle/>
+          <a:p>
+            <a:pPr algn="l">
+              <a:defRPr sz="1100" b="0">
+                <a:solidFill>
+                  <a:srgbClr val="BBBBBB"/>
+                </a:solidFill>
+                <a:latin typeface="Calibri"/>
+              </a:defRPr>
+            </a:pPr>
+            <a:r>
+              <a:t>Agent Bricks  |  Genie Spaces</a:t>
+            </a:r>
+            <a:br/>
+            <a:r>
+              <a:t>UC Functions  |  Model Serving</a:t>
+            </a:r>
+            <a:br/>
+            <a:r>
+              <a:t>Multi-Agent Supervisor orchestration</a:t>
+            </a:r>
+          </a:p>
+        </p:txBody>
+      </p:sp>
+      <p:sp>
+        <p:nvSpPr>
+          <p:cNvPr id="14" name="TextBox 13"/>
+          <p:cNvSpPr txBox="1"/>
+          <p:nvPr/>
+        </p:nvSpPr>
+        <p:spPr>
+          <a:xfrm>
+            <a:off x="731520" y="4142232"/>
+            <a:ext cx="1463040" cy="320040"/>
+          </a:xfrm>
+          <a:prstGeom prst="rect">
+            <a:avLst/>
+          </a:prstGeom>
+          <a:noFill/>
+        </p:spPr>
+        <p:txBody>
+          <a:bodyPr wrap="square">
+            <a:spAutoFit/>
+          </a:bodyPr>
+          <a:lstStyle/>
+          <a:p>
+            <a:pPr algn="l">
+              <a:defRPr sz="1200" b="0">
+                <a:solidFill>
+                  <a:srgbClr val="BBBBBB"/>
+                </a:solidFill>
+                <a:latin typeface="Calibri"/>
+              </a:defRPr>
+            </a:pPr>
+            <a:r>
+              <a:t>10:15 - 10:30</a:t>
+            </a:r>
+          </a:p>
+        </p:txBody>
+      </p:sp>
+      <p:sp>
+        <p:nvSpPr>
+          <p:cNvPr id="15" name="TextBox 14"/>
+          <p:cNvSpPr txBox="1"/>
+          <p:nvPr/>
+        </p:nvSpPr>
+        <p:spPr>
+          <a:xfrm>
+            <a:off x="2377440" y="4142232"/>
+            <a:ext cx="3840480" cy="320040"/>
+          </a:xfrm>
+          <a:prstGeom prst="rect">
+            <a:avLst/>
+          </a:prstGeom>
+          <a:noFill/>
+        </p:spPr>
+        <p:txBody>
+          <a:bodyPr wrap="square">
+            <a:spAutoFit/>
+          </a:bodyPr>
+          <a:lstStyle/>
+          <a:p>
+            <a:pPr algn="l">
+              <a:defRPr sz="1100" b="0">
+                <a:solidFill>
+                  <a:srgbClr val="888888"/>
+                </a:solidFill>
+                <a:latin typeface="Calibri"/>
+              </a:defRPr>
+            </a:pPr>
+            <a:r>
+              <a:t>Break</a:t>
+            </a:r>
+          </a:p>
+        </p:txBody>
+      </p:sp>
+      <p:sp>
+        <p:nvSpPr>
+          <p:cNvPr id="16" name="Rounded Rectangle 15"/>
           <p:cNvSpPr/>
           <p:nvPr/>
         </p:nvSpPr>
         <p:spPr>
           <a:xfrm>
-            <a:off x="6217920" y="2926080"/>
-            <a:ext cx="5303520" cy="3474720"/>
+            <a:off x="457200" y="4489704"/>
+            <a:ext cx="11247120" cy="960120"/>
           </a:xfrm>
           <a:prstGeom prst="roundRect">
             <a:avLst/>
@@ -5344,20 +5222,20 @@
       </p:sp>
       <p:sp>
         <p:nvSpPr>
-          <p:cNvPr id="10" name="Rectangle 9"/>
+          <p:cNvPr id="17" name="Rectangle 16"/>
           <p:cNvSpPr/>
           <p:nvPr/>
         </p:nvSpPr>
         <p:spPr>
           <a:xfrm>
-            <a:off x="6400800" y="3063240"/>
-            <a:ext cx="45720" cy="457200"/>
+            <a:off x="594360" y="4581144"/>
+            <a:ext cx="45720" cy="777240"/>
           </a:xfrm>
           <a:prstGeom prst="rect">
             <a:avLst/>
           </a:prstGeom>
           <a:solidFill>
-            <a:srgbClr val="42A5F5"/>
+            <a:srgbClr val="FF3821"/>
           </a:solidFill>
           <a:ln>
             <a:noFill/>
@@ -5387,14 +5265,14 @@
       </p:sp>
       <p:sp>
         <p:nvSpPr>
-          <p:cNvPr id="11" name="TextBox 10"/>
-          <p:cNvSpPr txBox="1"/>
-          <p:nvPr/>
-        </p:nvSpPr>
-        <p:spPr>
-          <a:xfrm>
-            <a:off x="6629400" y="3017520"/>
-            <a:ext cx="4663440" cy="457200"/>
+          <p:cNvPr id="18" name="TextBox 17"/>
+          <p:cNvSpPr txBox="1"/>
+          <p:nvPr/>
+        </p:nvSpPr>
+        <p:spPr>
+          <a:xfrm>
+            <a:off x="731520" y="4535424"/>
+            <a:ext cx="1463040" cy="320040"/>
           </a:xfrm>
           <a:prstGeom prst="rect">
             <a:avLst/>
@@ -5408,150 +5286,442 @@
           <a:lstStyle/>
           <a:p>
             <a:pPr algn="l">
-              <a:defRPr sz="1800" b="1">
-                <a:solidFill>
-                  <a:srgbClr val="42A5F5"/>
-                </a:solidFill>
-                <a:latin typeface="Calibri"/>
-              </a:defRPr>
-            </a:pPr>
-            <a:r>
-              <a:t>Key Capabilities</a:t>
-            </a:r>
-          </a:p>
-        </p:txBody>
-      </p:sp>
-      <p:sp>
-        <p:nvSpPr>
-          <p:cNvPr id="12" name="TextBox 11"/>
-          <p:cNvSpPr txBox="1"/>
-          <p:nvPr/>
-        </p:nvSpPr>
-        <p:spPr>
-          <a:xfrm>
-            <a:off x="6629400" y="3566160"/>
-            <a:ext cx="4663440" cy="2560320"/>
-          </a:xfrm>
-          <a:prstGeom prst="rect">
-            <a:avLst/>
-          </a:prstGeom>
-          <a:noFill/>
-        </p:spPr>
-        <p:txBody>
-          <a:bodyPr wrap="square">
-            <a:spAutoFit/>
-          </a:bodyPr>
-          <a:lstStyle/>
-          <a:p>
-            <a:pPr>
-              <a:spcAft>
-                <a:spcPts val="600"/>
-              </a:spcAft>
-              <a:defRPr sz="1300">
-                <a:solidFill>
-                  <a:srgbClr val="BBBBBB"/>
-                </a:solidFill>
-                <a:latin typeface="Calibri"/>
-              </a:defRPr>
-            </a:pPr>
-            <a:r>
-              <a:t>  Data Engineering: Auto Loader, SDP, Structured Streaming</a:t>
-            </a:r>
-          </a:p>
-          <a:p>
-            <a:pPr>
-              <a:spcAft>
-                <a:spcPts val="600"/>
-              </a:spcAft>
-              <a:defRPr sz="1300">
-                <a:solidFill>
-                  <a:srgbClr val="BBBBBB"/>
-                </a:solidFill>
-                <a:latin typeface="Calibri"/>
-              </a:defRPr>
-            </a:pPr>
-            <a:r>
-              <a:t>  Data Science &amp; ML: MLflow, Feature Store, Model Serving</a:t>
-            </a:r>
-          </a:p>
-          <a:p>
-            <a:pPr>
-              <a:spcAft>
-                <a:spcPts val="600"/>
-              </a:spcAft>
-              <a:defRPr sz="1300">
-                <a:solidFill>
-                  <a:srgbClr val="BBBBBB"/>
-                </a:solidFill>
-                <a:latin typeface="Calibri"/>
-              </a:defRPr>
-            </a:pPr>
-            <a:r>
-              <a:t>  SQL Analytics: SQL Warehouses, AI/BI Dashboards, Genie</a:t>
-            </a:r>
-          </a:p>
-          <a:p>
-            <a:pPr>
-              <a:spcAft>
-                <a:spcPts val="600"/>
-              </a:spcAft>
-              <a:defRPr sz="1300">
-                <a:solidFill>
-                  <a:srgbClr val="BBBBBB"/>
-                </a:solidFill>
-                <a:latin typeface="Calibri"/>
-              </a:defRPr>
-            </a:pPr>
-            <a:r>
-              <a:t>  AI &amp; GenAI: Foundation Models, Agent Bricks, Vector Search</a:t>
-            </a:r>
-          </a:p>
-          <a:p>
-            <a:pPr>
-              <a:spcAft>
-                <a:spcPts val="600"/>
-              </a:spcAft>
-              <a:defRPr sz="1300">
-                <a:solidFill>
-                  <a:srgbClr val="BBBBBB"/>
-                </a:solidFill>
-                <a:latin typeface="Calibri"/>
-              </a:defRPr>
-            </a:pPr>
-            <a:r>
-              <a:t>  Governance: Unity Catalog, Lineage, Row/Column Security</a:t>
-            </a:r>
-          </a:p>
-          <a:p>
-            <a:pPr>
-              <a:spcAft>
-                <a:spcPts val="600"/>
-              </a:spcAft>
-              <a:defRPr sz="1300">
-                <a:solidFill>
-                  <a:srgbClr val="BBBBBB"/>
-                </a:solidFill>
-                <a:latin typeface="Calibri"/>
-              </a:defRPr>
-            </a:pPr>
-            <a:r>
-              <a:t>  Workspace: Notebooks, Repos, Git integration, CLI &amp; SDK</a:t>
-            </a:r>
-          </a:p>
-          <a:p>
-            <a:pPr>
-              <a:spcAft>
-                <a:spcPts val="600"/>
-              </a:spcAft>
-              <a:defRPr sz="1300">
-                <a:solidFill>
-                  <a:srgbClr val="BBBBBB"/>
-                </a:solidFill>
-                <a:latin typeface="Calibri"/>
-              </a:defRPr>
-            </a:pPr>
-            <a:r>
-              <a:t>  Marketplace: shared data products &amp; solution accelerators</a:t>
+              <a:defRPr sz="1200" b="1">
+                <a:solidFill>
+                  <a:srgbClr val="FFFFFF"/>
+                </a:solidFill>
+                <a:latin typeface="Calibri"/>
+              </a:defRPr>
+            </a:pPr>
+            <a:r>
+              <a:t>10:30 - 11:45</a:t>
+            </a:r>
+          </a:p>
+        </p:txBody>
+      </p:sp>
+      <p:sp>
+        <p:nvSpPr>
+          <p:cNvPr id="19" name="TextBox 18"/>
+          <p:cNvSpPr txBox="1"/>
+          <p:nvPr/>
+        </p:nvSpPr>
+        <p:spPr>
+          <a:xfrm>
+            <a:off x="2377440" y="4535424"/>
+            <a:ext cx="3840480" cy="320040"/>
+          </a:xfrm>
+          <a:prstGeom prst="rect">
+            <a:avLst/>
+          </a:prstGeom>
+          <a:noFill/>
+        </p:spPr>
+        <p:txBody>
+          <a:bodyPr wrap="square">
+            <a:spAutoFit/>
+          </a:bodyPr>
+          <a:lstStyle/>
+          <a:p>
+            <a:pPr algn="l">
+              <a:defRPr sz="1300" b="1">
+                <a:solidFill>
+                  <a:srgbClr val="FF3821"/>
+                </a:solidFill>
+                <a:latin typeface="Calibri"/>
+              </a:defRPr>
+            </a:pPr>
+            <a:r>
+              <a:t>Data Engineering</a:t>
+            </a:r>
+          </a:p>
+        </p:txBody>
+      </p:sp>
+      <p:sp>
+        <p:nvSpPr>
+          <p:cNvPr id="20" name="TextBox 19"/>
+          <p:cNvSpPr txBox="1"/>
+          <p:nvPr/>
+        </p:nvSpPr>
+        <p:spPr>
+          <a:xfrm>
+            <a:off x="2377440" y="4809744"/>
+            <a:ext cx="3840480" cy="274320"/>
+          </a:xfrm>
+          <a:prstGeom prst="rect">
+            <a:avLst/>
+          </a:prstGeom>
+          <a:noFill/>
+        </p:spPr>
+        <p:txBody>
+          <a:bodyPr wrap="square">
+            <a:spAutoFit/>
+          </a:bodyPr>
+          <a:lstStyle/>
+          <a:p>
+            <a:pPr algn="l">
+              <a:defRPr sz="1100" b="0">
+                <a:solidFill>
+                  <a:srgbClr val="888888"/>
+                </a:solidFill>
+                <a:latin typeface="Calibri"/>
+              </a:defRPr>
+            </a:pPr>
+            <a:r>
+              <a:t>Track: Data Pipelines</a:t>
+            </a:r>
+          </a:p>
+        </p:txBody>
+      </p:sp>
+      <p:sp>
+        <p:nvSpPr>
+          <p:cNvPr id="21" name="TextBox 20"/>
+          <p:cNvSpPr txBox="1"/>
+          <p:nvPr/>
+        </p:nvSpPr>
+        <p:spPr>
+          <a:xfrm>
+            <a:off x="6400800" y="4553712"/>
+            <a:ext cx="5029200" cy="822960"/>
+          </a:xfrm>
+          <a:prstGeom prst="rect">
+            <a:avLst/>
+          </a:prstGeom>
+          <a:noFill/>
+        </p:spPr>
+        <p:txBody>
+          <a:bodyPr wrap="square">
+            <a:spAutoFit/>
+          </a:bodyPr>
+          <a:lstStyle/>
+          <a:p>
+            <a:pPr algn="l">
+              <a:defRPr sz="1100" b="0">
+                <a:solidFill>
+                  <a:srgbClr val="BBBBBB"/>
+                </a:solidFill>
+                <a:latin typeface="Calibri"/>
+              </a:defRPr>
+            </a:pPr>
+            <a:r>
+              <a:t>Auto Loader  |  Document AI (ai_parse_document)</a:t>
+            </a:r>
+            <a:br/>
+            <a:r>
+              <a:t>SDP Pipeline: Bronze / Silver / Gold</a:t>
+            </a:r>
+            <a:br/>
+            <a:r>
+              <a:t>3-way join on application_id</a:t>
+            </a:r>
+          </a:p>
+        </p:txBody>
+      </p:sp>
+      <p:sp>
+        <p:nvSpPr>
+          <p:cNvPr id="22" name="TextBox 21"/>
+          <p:cNvSpPr txBox="1"/>
+          <p:nvPr/>
+        </p:nvSpPr>
+        <p:spPr>
+          <a:xfrm>
+            <a:off x="731520" y="5477256"/>
+            <a:ext cx="1463040" cy="320040"/>
+          </a:xfrm>
+          <a:prstGeom prst="rect">
+            <a:avLst/>
+          </a:prstGeom>
+          <a:noFill/>
+        </p:spPr>
+        <p:txBody>
+          <a:bodyPr wrap="square">
+            <a:spAutoFit/>
+          </a:bodyPr>
+          <a:lstStyle/>
+          <a:p>
+            <a:pPr algn="l">
+              <a:defRPr sz="1200" b="0">
+                <a:solidFill>
+                  <a:srgbClr val="BBBBBB"/>
+                </a:solidFill>
+                <a:latin typeface="Calibri"/>
+              </a:defRPr>
+            </a:pPr>
+            <a:r>
+              <a:t>11:45 - 12:00</a:t>
+            </a:r>
+          </a:p>
+        </p:txBody>
+      </p:sp>
+      <p:sp>
+        <p:nvSpPr>
+          <p:cNvPr id="23" name="TextBox 22"/>
+          <p:cNvSpPr txBox="1"/>
+          <p:nvPr/>
+        </p:nvSpPr>
+        <p:spPr>
+          <a:xfrm>
+            <a:off x="2377440" y="5477256"/>
+            <a:ext cx="3840480" cy="320040"/>
+          </a:xfrm>
+          <a:prstGeom prst="rect">
+            <a:avLst/>
+          </a:prstGeom>
+          <a:noFill/>
+        </p:spPr>
+        <p:txBody>
+          <a:bodyPr wrap="square">
+            <a:spAutoFit/>
+          </a:bodyPr>
+          <a:lstStyle/>
+          <a:p>
+            <a:pPr algn="l">
+              <a:defRPr sz="1100" b="0">
+                <a:solidFill>
+                  <a:srgbClr val="888888"/>
+                </a:solidFill>
+                <a:latin typeface="Calibri"/>
+              </a:defRPr>
+            </a:pPr>
+            <a:r>
+              <a:t>Break</a:t>
+            </a:r>
+          </a:p>
+        </p:txBody>
+      </p:sp>
+      <p:sp>
+        <p:nvSpPr>
+          <p:cNvPr id="24" name="Rounded Rectangle 23"/>
+          <p:cNvSpPr/>
+          <p:nvPr/>
+        </p:nvSpPr>
+        <p:spPr>
+          <a:xfrm>
+            <a:off x="457200" y="5824728"/>
+            <a:ext cx="11247120" cy="960120"/>
+          </a:xfrm>
+          <a:prstGeom prst="roundRect">
+            <a:avLst/>
+          </a:prstGeom>
+          <a:solidFill>
+            <a:srgbClr val="252A30"/>
+          </a:solidFill>
+          <a:ln>
+            <a:noFill/>
+          </a:ln>
+          <a:effectLst/>
+        </p:spPr>
+        <p:style>
+          <a:lnRef idx="1">
+            <a:schemeClr val="accent1"/>
+          </a:lnRef>
+          <a:fillRef idx="3">
+            <a:schemeClr val="accent1"/>
+          </a:fillRef>
+          <a:effectRef idx="2">
+            <a:schemeClr val="accent1"/>
+          </a:effectRef>
+          <a:fontRef idx="minor">
+            <a:schemeClr val="lt1"/>
+          </a:fontRef>
+        </p:style>
+        <p:txBody>
+          <a:bodyPr rtlCol="0" anchor="ctr"/>
+          <a:lstStyle/>
+          <a:p>
+            <a:pPr algn="ctr"/>
+          </a:p>
+        </p:txBody>
+      </p:sp>
+      <p:sp>
+        <p:nvSpPr>
+          <p:cNvPr id="25" name="Rectangle 24"/>
+          <p:cNvSpPr/>
+          <p:nvPr/>
+        </p:nvSpPr>
+        <p:spPr>
+          <a:xfrm>
+            <a:off x="594360" y="5916168"/>
+            <a:ext cx="45720" cy="777240"/>
+          </a:xfrm>
+          <a:prstGeom prst="rect">
+            <a:avLst/>
+          </a:prstGeom>
+          <a:solidFill>
+            <a:srgbClr val="FFB72B"/>
+          </a:solidFill>
+          <a:ln>
+            <a:noFill/>
+          </a:ln>
+        </p:spPr>
+        <p:style>
+          <a:lnRef idx="1">
+            <a:schemeClr val="accent1"/>
+          </a:lnRef>
+          <a:fillRef idx="3">
+            <a:schemeClr val="accent1"/>
+          </a:fillRef>
+          <a:effectRef idx="2">
+            <a:schemeClr val="accent1"/>
+          </a:effectRef>
+          <a:fontRef idx="minor">
+            <a:schemeClr val="lt1"/>
+          </a:fontRef>
+        </p:style>
+        <p:txBody>
+          <a:bodyPr rtlCol="0" anchor="ctr"/>
+          <a:lstStyle/>
+          <a:p>
+            <a:pPr algn="ctr"/>
+          </a:p>
+        </p:txBody>
+      </p:sp>
+      <p:sp>
+        <p:nvSpPr>
+          <p:cNvPr id="26" name="TextBox 25"/>
+          <p:cNvSpPr txBox="1"/>
+          <p:nvPr/>
+        </p:nvSpPr>
+        <p:spPr>
+          <a:xfrm>
+            <a:off x="731520" y="5870448"/>
+            <a:ext cx="1463040" cy="320040"/>
+          </a:xfrm>
+          <a:prstGeom prst="rect">
+            <a:avLst/>
+          </a:prstGeom>
+          <a:noFill/>
+        </p:spPr>
+        <p:txBody>
+          <a:bodyPr wrap="square">
+            <a:spAutoFit/>
+          </a:bodyPr>
+          <a:lstStyle/>
+          <a:p>
+            <a:pPr algn="l">
+              <a:defRPr sz="1200" b="1">
+                <a:solidFill>
+                  <a:srgbClr val="FFFFFF"/>
+                </a:solidFill>
+                <a:latin typeface="Calibri"/>
+              </a:defRPr>
+            </a:pPr>
+            <a:r>
+              <a:t>12:00 - 1:00</a:t>
+            </a:r>
+          </a:p>
+        </p:txBody>
+      </p:sp>
+      <p:sp>
+        <p:nvSpPr>
+          <p:cNvPr id="27" name="TextBox 26"/>
+          <p:cNvSpPr txBox="1"/>
+          <p:nvPr/>
+        </p:nvSpPr>
+        <p:spPr>
+          <a:xfrm>
+            <a:off x="2377440" y="5870448"/>
+            <a:ext cx="3840480" cy="320040"/>
+          </a:xfrm>
+          <a:prstGeom prst="rect">
+            <a:avLst/>
+          </a:prstGeom>
+          <a:noFill/>
+        </p:spPr>
+        <p:txBody>
+          <a:bodyPr wrap="square">
+            <a:spAutoFit/>
+          </a:bodyPr>
+          <a:lstStyle/>
+          <a:p>
+            <a:pPr algn="l">
+              <a:defRPr sz="1300" b="1">
+                <a:solidFill>
+                  <a:srgbClr val="FFB72B"/>
+                </a:solidFill>
+                <a:latin typeface="Calibri"/>
+              </a:defRPr>
+            </a:pPr>
+            <a:r>
+              <a:t>ML &amp; MLOps/LLMOps</a:t>
+            </a:r>
+          </a:p>
+        </p:txBody>
+      </p:sp>
+      <p:sp>
+        <p:nvSpPr>
+          <p:cNvPr id="28" name="TextBox 27"/>
+          <p:cNvSpPr txBox="1"/>
+          <p:nvPr/>
+        </p:nvSpPr>
+        <p:spPr>
+          <a:xfrm>
+            <a:off x="2377440" y="6144768"/>
+            <a:ext cx="3840480" cy="274320"/>
+          </a:xfrm>
+          <a:prstGeom prst="rect">
+            <a:avLst/>
+          </a:prstGeom>
+          <a:noFill/>
+        </p:spPr>
+        <p:txBody>
+          <a:bodyPr wrap="square">
+            <a:spAutoFit/>
+          </a:bodyPr>
+          <a:lstStyle/>
+          <a:p>
+            <a:pPr algn="l">
+              <a:defRPr sz="1100" b="0">
+                <a:solidFill>
+                  <a:srgbClr val="888888"/>
+                </a:solidFill>
+                <a:latin typeface="Calibri"/>
+              </a:defRPr>
+            </a:pPr>
+            <a:r>
+              <a:t>Track: ML / MLOps</a:t>
+            </a:r>
+          </a:p>
+        </p:txBody>
+      </p:sp>
+      <p:sp>
+        <p:nvSpPr>
+          <p:cNvPr id="29" name="TextBox 28"/>
+          <p:cNvSpPr txBox="1"/>
+          <p:nvPr/>
+        </p:nvSpPr>
+        <p:spPr>
+          <a:xfrm>
+            <a:off x="6400800" y="5888736"/>
+            <a:ext cx="5029200" cy="822960"/>
+          </a:xfrm>
+          <a:prstGeom prst="rect">
+            <a:avLst/>
+          </a:prstGeom>
+          <a:noFill/>
+        </p:spPr>
+        <p:txBody>
+          <a:bodyPr wrap="square">
+            <a:spAutoFit/>
+          </a:bodyPr>
+          <a:lstStyle/>
+          <a:p>
+            <a:pPr algn="l">
+              <a:defRPr sz="1100" b="0">
+                <a:solidFill>
+                  <a:srgbClr val="BBBBBB"/>
+                </a:solidFill>
+                <a:latin typeface="Calibri"/>
+              </a:defRPr>
+            </a:pPr>
+            <a:r>
+              <a:t>Feature Engineering + UC Functions</a:t>
+            </a:r>
+            <a:br/>
+            <a:r>
+              <a:t>Optuna HPO + pyfunc wrapper with rules</a:t>
+            </a:r>
+            <a:br/>
+            <a:r>
+              <a:t>Champion/Challenger  |  Serving  |  Monitoring</a:t>
             </a:r>
           </a:p>
         </p:txBody>
@@ -5656,7 +5826,7 @@
               </a:defRPr>
             </a:pPr>
             <a:r>
-              <a:t>Session 1: Data Engineering</a:t>
+              <a:t>Databricks Platform Overview</a:t>
             </a:r>
           </a:p>
         </p:txBody>
@@ -5692,7 +5862,7 @@
               </a:defRPr>
             </a:pPr>
             <a:r>
-              <a:t>Ingesting structured and unstructured data through a medallion architecture  |  60 min</a:t>
+              <a:t>A unified analytics platform for data, AI, and governance  |  45 min</a:t>
             </a:r>
           </a:p>
         </p:txBody>
@@ -5756,7 +5926,7 @@
             <a:avLst/>
           </a:prstGeom>
           <a:solidFill>
-            <a:srgbClr val="FF3821"/>
+            <a:srgbClr val="42A5F5"/>
           </a:solidFill>
           <a:ln>
             <a:noFill/>
@@ -5809,13 +5979,13 @@
             <a:pPr algn="l">
               <a:defRPr sz="1800" b="1">
                 <a:solidFill>
-                  <a:srgbClr val="FF3821"/>
-                </a:solidFill>
-                <a:latin typeface="Calibri"/>
-              </a:defRPr>
-            </a:pPr>
-            <a:r>
-              <a:t>What We Build</a:t>
+                  <a:srgbClr val="42A5F5"/>
+                </a:solidFill>
+                <a:latin typeface="Calibri"/>
+              </a:defRPr>
+            </a:pPr>
+            <a:r>
+              <a:t>Lakehouse Architecture</a:t>
             </a:r>
           </a:p>
         </p:txBody>
@@ -5854,7 +6024,7 @@
               </a:defRPr>
             </a:pPr>
             <a:r>
-              <a:t>  Generate synthetic applications (parquet), pay stubs (PDF), photo IDs (JPEG)</a:t>
+              <a:t>  Data Lakehouse: combines data lake + data warehouse</a:t>
             </a:r>
           </a:p>
           <a:p>
@@ -5870,7 +6040,7 @@
               </a:defRPr>
             </a:pPr>
             <a:r>
-              <a:t>  Store raw files in Unity Catalog Volumes</a:t>
+              <a:t>  Delta Lake: ACID transactions, time travel, Z-order/Liquid Clustering</a:t>
             </a:r>
           </a:p>
           <a:p>
@@ -5886,7 +6056,7 @@
               </a:defRPr>
             </a:pPr>
             <a:r>
-              <a:t>  Auto Loader ingestion (parquet + binaryFile)</a:t>
+              <a:t>  Unity Catalog: unified governance for tables, volumes, models, functions</a:t>
             </a:r>
           </a:p>
           <a:p>
@@ -5902,7 +6072,7 @@
               </a:defRPr>
             </a:pPr>
             <a:r>
-              <a:t>  AI extraction: ai_parse_document + ai_query</a:t>
+              <a:t>  Serverless compute: instant-on SQL warehouses &amp; job clusters</a:t>
             </a:r>
           </a:p>
           <a:p>
@@ -5918,7 +6088,7 @@
               </a:defRPr>
             </a:pPr>
             <a:r>
-              <a:t>  Bronze / Silver / Gold SDP pipeline</a:t>
+              <a:t>  Workflows: orchestrate notebooks, pipelines, and jobs</a:t>
             </a:r>
           </a:p>
           <a:p>
@@ -5934,7 +6104,7 @@
               </a:defRPr>
             </a:pPr>
             <a:r>
-              <a:t>  3-way LEFT JOIN on application_id</a:t>
+              <a:t>  Spark Declarative Pipelines: managed ETL (bronze/silver/gold)</a:t>
             </a:r>
           </a:p>
           <a:p>
@@ -5950,7 +6120,7 @@
               </a:defRPr>
             </a:pPr>
             <a:r>
-              <a:t>  Derived ML features with verification signals</a:t>
+              <a:t>  Photon: vectorized query engine for fast SQL &amp; Spark</a:t>
             </a:r>
           </a:p>
         </p:txBody>
@@ -6014,7 +6184,7 @@
             <a:avLst/>
           </a:prstGeom>
           <a:solidFill>
-            <a:srgbClr val="FF3821"/>
+            <a:srgbClr val="42A5F5"/>
           </a:solidFill>
           <a:ln>
             <a:noFill/>
@@ -6067,13 +6237,13 @@
             <a:pPr algn="l">
               <a:defRPr sz="1800" b="1">
                 <a:solidFill>
-                  <a:srgbClr val="FF3821"/>
-                </a:solidFill>
-                <a:latin typeface="Calibri"/>
-              </a:defRPr>
-            </a:pPr>
-            <a:r>
-              <a:t>Notebooks &amp; Files</a:t>
+                  <a:srgbClr val="42A5F5"/>
+                </a:solidFill>
+                <a:latin typeface="Calibri"/>
+              </a:defRPr>
+            </a:pPr>
+            <a:r>
+              <a:t>Key Capabilities</a:t>
             </a:r>
           </a:p>
         </p:txBody>
@@ -6112,7 +6282,7 @@
               </a:defRPr>
             </a:pPr>
             <a:r>
-              <a:t>  01_generate_lender_data.py</a:t>
+              <a:t>  Data Engineering: Auto Loader, SDP, Structured Streaming</a:t>
             </a:r>
           </a:p>
           <a:p>
@@ -6128,7 +6298,7 @@
               </a:defRPr>
             </a:pPr>
             <a:r>
-              <a:t>  01_generate_lender_data_pdf.py</a:t>
+              <a:t>  Data Science &amp; ML: MLflow, Feature Store, Model Serving</a:t>
             </a:r>
           </a:p>
           <a:p>
@@ -6144,7 +6314,7 @@
               </a:defRPr>
             </a:pPr>
             <a:r>
-              <a:t>  bronze_applications.py    (Auto Loader parquet)</a:t>
+              <a:t>  SQL Analytics: SQL Warehouses, AI/BI Dashboards, Genie</a:t>
             </a:r>
           </a:p>
           <a:p>
@@ -6160,7 +6330,7 @@
               </a:defRPr>
             </a:pPr>
             <a:r>
-              <a:t>  bronze_pay_stubs.py       (AI extraction PDF)</a:t>
+              <a:t>  AI &amp; GenAI: Foundation Models, Agent Bricks, Vector Search</a:t>
             </a:r>
           </a:p>
           <a:p>
@@ -6176,7 +6346,7 @@
               </a:defRPr>
             </a:pPr>
             <a:r>
-              <a:t>  bronze_photo_ids.py       (AI extraction JPEG)</a:t>
+              <a:t>  Governance: Unity Catalog, Lineage, Row/Column Security</a:t>
             </a:r>
           </a:p>
           <a:p>
@@ -6192,7 +6362,7 @@
               </a:defRPr>
             </a:pPr>
             <a:r>
-              <a:t>  silver_applications.py    (3-way join)</a:t>
+              <a:t>  Workspace: Notebooks, Repos, Git integration, CLI &amp; SDK</a:t>
             </a:r>
           </a:p>
           <a:p>
@@ -6208,7 +6378,7 @@
               </a:defRPr>
             </a:pPr>
             <a:r>
-              <a:t>  gold_features.py          (ML features)</a:t>
+              <a:t>  Marketplace: shared data products &amp; solution accelerators</a:t>
             </a:r>
           </a:p>
         </p:txBody>
@@ -6313,7 +6483,7 @@
               </a:defRPr>
             </a:pPr>
             <a:r>
-              <a:t>Session 2: Machine Learning &amp; MLOps</a:t>
+              <a:t>Data Engineering</a:t>
             </a:r>
           </a:p>
         </p:txBody>
@@ -6349,7 +6519,7 @@
               </a:defRPr>
             </a:pPr>
             <a:r>
-              <a:t>Feature engineering, model training with business rules, and production deployment  |  75 min</a:t>
+              <a:t>Ingesting structured and unstructured data through a medallion architecture  |  75 min</a:t>
             </a:r>
           </a:p>
         </p:txBody>
@@ -6413,7 +6583,7 @@
             <a:avLst/>
           </a:prstGeom>
           <a:solidFill>
-            <a:srgbClr val="FFB72B"/>
+            <a:srgbClr val="FF3821"/>
           </a:solidFill>
           <a:ln>
             <a:noFill/>
@@ -6466,7 +6636,7 @@
             <a:pPr algn="l">
               <a:defRPr sz="1800" b="1">
                 <a:solidFill>
-                  <a:srgbClr val="FFB72B"/>
+                  <a:srgbClr val="FF3821"/>
                 </a:solidFill>
                 <a:latin typeface="Calibri"/>
               </a:defRPr>
@@ -6511,7 +6681,7 @@
               </a:defRPr>
             </a:pPr>
             <a:r>
-              <a:t>  Feature table + 3 on-demand UC functions</a:t>
+              <a:t>  Generate synthetic applications (parquet), pay stubs (PDF), photo IDs (JPEG)</a:t>
             </a:r>
           </a:p>
           <a:p>
@@ -6527,7 +6697,7 @@
               </a:defRPr>
             </a:pPr>
             <a:r>
-              <a:t>  Optuna HPO (LogReg, RF, LightGBM)</a:t>
+              <a:t>  Store raw files in Unity Catalog Volumes</a:t>
             </a:r>
           </a:p>
           <a:p>
@@ -6543,7 +6713,7 @@
               </a:defRPr>
             </a:pPr>
             <a:r>
-              <a:t>  Custom pyfunc wrapper with deterministic rules</a:t>
+              <a:t>  Auto Loader ingestion (parquet + binaryFile)</a:t>
             </a:r>
           </a:p>
           <a:p>
@@ -6559,7 +6729,7 @@
               </a:defRPr>
             </a:pPr>
             <a:r>
-              <a:t>  Structured output: prediction + reasoning</a:t>
+              <a:t>  AI extraction: ai_parse_document + ai_query</a:t>
             </a:r>
           </a:p>
           <a:p>
@@ -6575,7 +6745,7 @@
               </a:defRPr>
             </a:pPr>
             <a:r>
-              <a:t>  Champion / Challenger promotion flow</a:t>
+              <a:t>  Bronze / Silver / Gold SDP pipeline</a:t>
             </a:r>
           </a:p>
           <a:p>
@@ -6591,7 +6761,7 @@
               </a:defRPr>
             </a:pPr>
             <a:r>
-              <a:t>  Batch inference via fe.score_batch</a:t>
+              <a:t>  3-way LEFT JOIN on application_id</a:t>
             </a:r>
           </a:p>
           <a:p>
@@ -6607,23 +6777,7 @@
               </a:defRPr>
             </a:pPr>
             <a:r>
-              <a:t>  Real-time Model Serving endpoint</a:t>
-            </a:r>
-          </a:p>
-          <a:p>
-            <a:pPr>
-              <a:spcAft>
-                <a:spcPts val="600"/>
-              </a:spcAft>
-              <a:defRPr sz="1300">
-                <a:solidFill>
-                  <a:srgbClr val="BBBBBB"/>
-                </a:solidFill>
-                <a:latin typeface="Calibri"/>
-              </a:defRPr>
-            </a:pPr>
-            <a:r>
-              <a:t>  Lakehouse Monitoring + auto-retrain</a:t>
+              <a:t>  Derived ML features with verification signals</a:t>
             </a:r>
           </a:p>
         </p:txBody>
@@ -6687,7 +6841,7 @@
             <a:avLst/>
           </a:prstGeom>
           <a:solidFill>
-            <a:srgbClr val="FFB72B"/>
+            <a:srgbClr val="FF3821"/>
           </a:solidFill>
           <a:ln>
             <a:noFill/>
@@ -6740,13 +6894,13 @@
             <a:pPr algn="l">
               <a:defRPr sz="1800" b="1">
                 <a:solidFill>
-                  <a:srgbClr val="FFB72B"/>
-                </a:solidFill>
-                <a:latin typeface="Calibri"/>
-              </a:defRPr>
-            </a:pPr>
-            <a:r>
-              <a:t>Notebooks</a:t>
+                  <a:srgbClr val="FF3821"/>
+                </a:solidFill>
+                <a:latin typeface="Calibri"/>
+              </a:defRPr>
+            </a:pPr>
+            <a:r>
+              <a:t>Notebooks &amp; Files</a:t>
             </a:r>
           </a:p>
         </p:txBody>
@@ -6777,15 +6931,15 @@
               <a:spcAft>
                 <a:spcPts val="600"/>
               </a:spcAft>
-              <a:defRPr sz="1200">
-                <a:solidFill>
-                  <a:srgbClr val="BBBBBB"/>
-                </a:solidFill>
-                <a:latin typeface="Calibri"/>
-              </a:defRPr>
-            </a:pPr>
-            <a:r>
-              <a:t>  01_feature_engineering.py</a:t>
+              <a:defRPr sz="1300">
+                <a:solidFill>
+                  <a:srgbClr val="BBBBBB"/>
+                </a:solidFill>
+                <a:latin typeface="Calibri"/>
+              </a:defRPr>
+            </a:pPr>
+            <a:r>
+              <a:t>  01_generate_lender_data.py</a:t>
             </a:r>
           </a:p>
           <a:p>
@@ -6793,15 +6947,15 @@
               <a:spcAft>
                 <a:spcPts val="600"/>
               </a:spcAft>
-              <a:defRPr sz="1200">
-                <a:solidFill>
-                  <a:srgbClr val="BBBBBB"/>
-                </a:solidFill>
-                <a:latin typeface="Calibri"/>
-              </a:defRPr>
-            </a:pPr>
-            <a:r>
-              <a:t>  02_model_training_hpo_optuna.py</a:t>
+              <a:defRPr sz="1300">
+                <a:solidFill>
+                  <a:srgbClr val="BBBBBB"/>
+                </a:solidFill>
+                <a:latin typeface="Calibri"/>
+              </a:defRPr>
+            </a:pPr>
+            <a:r>
+              <a:t>  01_generate_lender_data_pdf.py</a:t>
             </a:r>
           </a:p>
           <a:p>
@@ -6809,15 +6963,15 @@
               <a:spcAft>
                 <a:spcPts val="600"/>
               </a:spcAft>
-              <a:defRPr sz="1200">
-                <a:solidFill>
-                  <a:srgbClr val="BBBBBB"/>
-                </a:solidFill>
-                <a:latin typeface="Calibri"/>
-              </a:defRPr>
-            </a:pPr>
-            <a:r>
-              <a:t>  03a_create_deployment_job.py</a:t>
+              <a:defRPr sz="1300">
+                <a:solidFill>
+                  <a:srgbClr val="BBBBBB"/>
+                </a:solidFill>
+                <a:latin typeface="Calibri"/>
+              </a:defRPr>
+            </a:pPr>
+            <a:r>
+              <a:t>  bronze_applications.py    (Auto Loader parquet)</a:t>
             </a:r>
           </a:p>
           <a:p>
@@ -6825,15 +6979,15 @@
               <a:spcAft>
                 <a:spcPts val="600"/>
               </a:spcAft>
-              <a:defRPr sz="1200">
-                <a:solidFill>
-                  <a:srgbClr val="BBBBBB"/>
-                </a:solidFill>
-                <a:latin typeface="Calibri"/>
-              </a:defRPr>
-            </a:pPr>
-            <a:r>
-              <a:t>  03b_from_notebook_to_models_in_uc.py</a:t>
+              <a:defRPr sz="1300">
+                <a:solidFill>
+                  <a:srgbClr val="BBBBBB"/>
+                </a:solidFill>
+                <a:latin typeface="Calibri"/>
+              </a:defRPr>
+            </a:pPr>
+            <a:r>
+              <a:t>  bronze_pay_stubs.py       (AI extraction PDF)</a:t>
             </a:r>
           </a:p>
           <a:p>
@@ -6841,15 +6995,15 @@
               <a:spcAft>
                 <a:spcPts val="600"/>
               </a:spcAft>
-              <a:defRPr sz="1200">
-                <a:solidFill>
-                  <a:srgbClr val="BBBBBB"/>
-                </a:solidFill>
-                <a:latin typeface="Calibri"/>
-              </a:defRPr>
-            </a:pPr>
-            <a:r>
-              <a:t>  04a_challenger_validation.py</a:t>
+              <a:defRPr sz="1300">
+                <a:solidFill>
+                  <a:srgbClr val="BBBBBB"/>
+                </a:solidFill>
+                <a:latin typeface="Calibri"/>
+              </a:defRPr>
+            </a:pPr>
+            <a:r>
+              <a:t>  bronze_photo_ids.py       (AI extraction JPEG)</a:t>
             </a:r>
           </a:p>
           <a:p>
@@ -6857,15 +7011,15 @@
               <a:spcAft>
                 <a:spcPts val="600"/>
               </a:spcAft>
-              <a:defRPr sz="1200">
-                <a:solidFill>
-                  <a:srgbClr val="BBBBBB"/>
-                </a:solidFill>
-                <a:latin typeface="Calibri"/>
-              </a:defRPr>
-            </a:pPr>
-            <a:r>
-              <a:t>  04b_challenger_approval.py</a:t>
+              <a:defRPr sz="1300">
+                <a:solidFill>
+                  <a:srgbClr val="BBBBBB"/>
+                </a:solidFill>
+                <a:latin typeface="Calibri"/>
+              </a:defRPr>
+            </a:pPr>
+            <a:r>
+              <a:t>  silver_applications.py    (3-way join)</a:t>
             </a:r>
           </a:p>
           <a:p>
@@ -6873,63 +7027,15 @@
               <a:spcAft>
                 <a:spcPts val="600"/>
               </a:spcAft>
-              <a:defRPr sz="1200">
-                <a:solidFill>
-                  <a:srgbClr val="BBBBBB"/>
-                </a:solidFill>
-                <a:latin typeface="Calibri"/>
-              </a:defRPr>
-            </a:pPr>
-            <a:r>
-              <a:t>  05_batch_inference.py</a:t>
-            </a:r>
-          </a:p>
-          <a:p>
-            <a:pPr>
-              <a:spcAft>
-                <a:spcPts val="600"/>
-              </a:spcAft>
-              <a:defRPr sz="1200">
-                <a:solidFill>
-                  <a:srgbClr val="BBBBBB"/>
-                </a:solidFill>
-                <a:latin typeface="Calibri"/>
-              </a:defRPr>
-            </a:pPr>
-            <a:r>
-              <a:t>  06_serve_features_and_model.py</a:t>
-            </a:r>
-          </a:p>
-          <a:p>
-            <a:pPr>
-              <a:spcAft>
-                <a:spcPts val="600"/>
-              </a:spcAft>
-              <a:defRPr sz="1200">
-                <a:solidFill>
-                  <a:srgbClr val="BBBBBB"/>
-                </a:solidFill>
-                <a:latin typeface="Calibri"/>
-              </a:defRPr>
-            </a:pPr>
-            <a:r>
-              <a:t>  07_model_monitoring.py</a:t>
-            </a:r>
-          </a:p>
-          <a:p>
-            <a:pPr>
-              <a:spcAft>
-                <a:spcPts val="600"/>
-              </a:spcAft>
-              <a:defRPr sz="1200">
-                <a:solidFill>
-                  <a:srgbClr val="BBBBBB"/>
-                </a:solidFill>
-                <a:latin typeface="Calibri"/>
-              </a:defRPr>
-            </a:pPr>
-            <a:r>
-              <a:t>  08_drift_detection.py</a:t>
+              <a:defRPr sz="1300">
+                <a:solidFill>
+                  <a:srgbClr val="BBBBBB"/>
+                </a:solidFill>
+                <a:latin typeface="Calibri"/>
+              </a:defRPr>
+            </a:pPr>
+            <a:r>
+              <a:t>  gold_features.py          (ML features)</a:t>
             </a:r>
           </a:p>
         </p:txBody>
@@ -7034,7 +7140,7 @@
               </a:defRPr>
             </a:pPr>
             <a:r>
-              <a:t>Session 3: AI &amp; Agent Bricks</a:t>
+              <a:t>ML &amp; MLOps/LLMOps</a:t>
             </a:r>
           </a:p>
         </p:txBody>
@@ -7070,7 +7176,7 @@
               </a:defRPr>
             </a:pPr>
             <a:r>
-              <a:t>Multi-Agent Supervisor + Genie Spaces + UC Function tools  |  60 min</a:t>
+              <a:t>Feature engineering, model training with business rules, and production deployment  |  60 min</a:t>
             </a:r>
           </a:p>
         </p:txBody>
@@ -7134,7 +7240,7 @@
             <a:avLst/>
           </a:prstGeom>
           <a:solidFill>
-            <a:srgbClr val="00C853"/>
+            <a:srgbClr val="FFB72B"/>
           </a:solidFill>
           <a:ln>
             <a:noFill/>
@@ -7187,7 +7293,7 @@
             <a:pPr algn="l">
               <a:defRPr sz="1800" b="1">
                 <a:solidFill>
-                  <a:srgbClr val="00C853"/>
+                  <a:srgbClr val="FFB72B"/>
                 </a:solidFill>
                 <a:latin typeface="Calibri"/>
               </a:defRPr>
@@ -7232,7 +7338,7 @@
               </a:defRPr>
             </a:pPr>
             <a:r>
-              <a:t>  Lender programs reference table (8 lenders, 20 programs)</a:t>
+              <a:t>  Feature table + 3 on-demand UC functions</a:t>
             </a:r>
           </a:p>
           <a:p>
@@ -7248,7 +7354,7 @@
               </a:defRPr>
             </a:pPr>
             <a:r>
-              <a:t>  shop_lenders() UC Function for rate comparison</a:t>
+              <a:t>  Optuna HPO (LogReg, RF, LightGBM)</a:t>
             </a:r>
           </a:p>
           <a:p>
@@ -7264,7 +7370,7 @@
               </a:defRPr>
             </a:pPr>
             <a:r>
-              <a:t>  Lender Shopping Agent (ResponsesAgent + LangGraph)</a:t>
+              <a:t>  Custom pyfunc wrapper with deterministic rules</a:t>
             </a:r>
           </a:p>
           <a:p>
@@ -7280,7 +7386,7 @@
               </a:defRPr>
             </a:pPr>
             <a:r>
-              <a:t>  Deploy custom agent to Model Serving endpoint</a:t>
+              <a:t>  Structured output: prediction + reasoning</a:t>
             </a:r>
           </a:p>
           <a:p>
@@ -7296,7 +7402,7 @@
               </a:defRPr>
             </a:pPr>
             <a:r>
-              <a:t>  Genie Space on gold + inference tables</a:t>
+              <a:t>  Champion / Challenger promotion flow</a:t>
             </a:r>
           </a:p>
           <a:p>
@@ -7312,7 +7418,7 @@
               </a:defRPr>
             </a:pPr>
             <a:r>
-              <a:t>  Multi-Agent Supervisor routing all 3 agents</a:t>
+              <a:t>  Batch inference via fe.score_batch</a:t>
             </a:r>
           </a:p>
           <a:p>
@@ -7328,7 +7434,23 @@
               </a:defRPr>
             </a:pPr>
             <a:r>
-              <a:t>  End-to-end test: approve, analyze, and shop rates</a:t>
+              <a:t>  Real-time Model Serving endpoint</a:t>
+            </a:r>
+          </a:p>
+          <a:p>
+            <a:pPr>
+              <a:spcAft>
+                <a:spcPts val="600"/>
+              </a:spcAft>
+              <a:defRPr sz="1300">
+                <a:solidFill>
+                  <a:srgbClr val="BBBBBB"/>
+                </a:solidFill>
+                <a:latin typeface="Calibri"/>
+              </a:defRPr>
+            </a:pPr>
+            <a:r>
+              <a:t>  Lakehouse Monitoring + auto-retrain</a:t>
             </a:r>
           </a:p>
         </p:txBody>
@@ -7392,7 +7514,7 @@
             <a:avLst/>
           </a:prstGeom>
           <a:solidFill>
-            <a:srgbClr val="00C853"/>
+            <a:srgbClr val="FFB72B"/>
           </a:solidFill>
           <a:ln>
             <a:noFill/>
@@ -7445,13 +7567,13 @@
             <a:pPr algn="l">
               <a:defRPr sz="1800" b="1">
                 <a:solidFill>
-                  <a:srgbClr val="00C853"/>
-                </a:solidFill>
-                <a:latin typeface="Calibri"/>
-              </a:defRPr>
-            </a:pPr>
-            <a:r>
-              <a:t>Notebooks &amp; Files</a:t>
+                  <a:srgbClr val="FFB72B"/>
+                </a:solidFill>
+                <a:latin typeface="Calibri"/>
+              </a:defRPr>
+            </a:pPr>
+            <a:r>
+              <a:t>Notebooks</a:t>
             </a:r>
           </a:p>
         </p:txBody>
@@ -7490,7 +7612,7 @@
               </a:defRPr>
             </a:pPr>
             <a:r>
-              <a:t>  09a_generate_lender_programs.py</a:t>
+              <a:t>  01_feature_engineering.py</a:t>
             </a:r>
           </a:p>
           <a:p>
@@ -7506,7 +7628,7 @@
               </a:defRPr>
             </a:pPr>
             <a:r>
-              <a:t>  09b_setup_agent_bricks.py</a:t>
+              <a:t>  02_model_training_hpo_optuna.py</a:t>
             </a:r>
           </a:p>
           <a:p>
@@ -7522,7 +7644,7 @@
               </a:defRPr>
             </a:pPr>
             <a:r>
-              <a:t>  src/agent/agent.py         (ResponsesAgent)</a:t>
+              <a:t>  03a_create_deployment_job.py</a:t>
             </a:r>
           </a:p>
           <a:p>
@@ -7538,7 +7660,7 @@
               </a:defRPr>
             </a:pPr>
             <a:r>
-              <a:t>  src/agent/test_agent.py    (test scenarios)</a:t>
+              <a:t>  03b_from_notebook_to_models_in_uc.py</a:t>
             </a:r>
           </a:p>
           <a:p>
@@ -7554,7 +7676,7 @@
               </a:defRPr>
             </a:pPr>
             <a:r>
-              <a:t>  src/agent/log_model.py     (MLflow registration)</a:t>
+              <a:t>  04a_challenger_validation.py</a:t>
             </a:r>
           </a:p>
           <a:p>
@@ -7570,7 +7692,7 @@
               </a:defRPr>
             </a:pPr>
             <a:r>
-              <a:t>  </a:t>
+              <a:t>  04b_challenger_approval.py</a:t>
             </a:r>
           </a:p>
           <a:p>
@@ -7586,7 +7708,7 @@
               </a:defRPr>
             </a:pPr>
             <a:r>
-              <a:t>  Databricks Components:</a:t>
+              <a:t>  05_batch_inference.py</a:t>
             </a:r>
           </a:p>
           <a:p>
@@ -7602,7 +7724,7 @@
               </a:defRPr>
             </a:pPr>
             <a:r>
-              <a:t>    Genie Space: CDK Lending Analytics</a:t>
+              <a:t>  06_serve_features_and_model.py</a:t>
             </a:r>
           </a:p>
           <a:p>
@@ -7618,7 +7740,23 @@
               </a:defRPr>
             </a:pPr>
             <a:r>
-              <a:t>    MAS: CDK Lending Supervisor</a:t>
+              <a:t>  07_model_monitoring.py</a:t>
+            </a:r>
+          </a:p>
+          <a:p>
+            <a:pPr>
+              <a:spcAft>
+                <a:spcPts val="600"/>
+              </a:spcAft>
+              <a:defRPr sz="1200">
+                <a:solidFill>
+                  <a:srgbClr val="BBBBBB"/>
+                </a:solidFill>
+                <a:latin typeface="Calibri"/>
+              </a:defRPr>
+            </a:pPr>
+            <a:r>
+              <a:t>  08_drift_detection.py</a:t>
             </a:r>
           </a:p>
         </p:txBody>
@@ -7723,21 +7861,57 @@
               </a:defRPr>
             </a:pPr>
             <a:r>
-              <a:t>Architecture Summary</a:t>
-            </a:r>
-          </a:p>
-        </p:txBody>
-      </p:sp>
-      <p:sp>
-        <p:nvSpPr>
-          <p:cNvPr id="4" name="Rounded Rectangle 3"/>
+              <a:t>AI Engineering</a:t>
+            </a:r>
+          </a:p>
+        </p:txBody>
+      </p:sp>
+      <p:sp>
+        <p:nvSpPr>
+          <p:cNvPr id="4" name="TextBox 3"/>
+          <p:cNvSpPr txBox="1"/>
+          <p:nvPr/>
+        </p:nvSpPr>
+        <p:spPr>
+          <a:xfrm>
+            <a:off x="822960" y="2194560"/>
+            <a:ext cx="10058400" cy="640080"/>
+          </a:xfrm>
+          <a:prstGeom prst="rect">
+            <a:avLst/>
+          </a:prstGeom>
+          <a:noFill/>
+        </p:spPr>
+        <p:txBody>
+          <a:bodyPr wrap="square">
+            <a:spAutoFit/>
+          </a:bodyPr>
+          <a:lstStyle/>
+          <a:p>
+            <a:pPr algn="l">
+              <a:defRPr sz="1800" b="0">
+                <a:solidFill>
+                  <a:srgbClr val="BBBBBB"/>
+                </a:solidFill>
+                <a:latin typeface="Calibri"/>
+              </a:defRPr>
+            </a:pPr>
+            <a:r>
+              <a:t>Agent Bricks  |  Genie Spaces  |  UC Functions  |  Model Serving  |  75 min</a:t>
+            </a:r>
+          </a:p>
+        </p:txBody>
+      </p:sp>
+      <p:sp>
+        <p:nvSpPr>
+          <p:cNvPr id="5" name="Rounded Rectangle 4"/>
           <p:cNvSpPr/>
           <p:nvPr/>
         </p:nvSpPr>
         <p:spPr>
           <a:xfrm>
-            <a:off x="731520" y="2926080"/>
-            <a:ext cx="10698480" cy="384048"/>
+            <a:off x="548640" y="2926080"/>
+            <a:ext cx="5303520" cy="3474720"/>
           </a:xfrm>
           <a:prstGeom prst="roundRect">
             <a:avLst/>
@@ -7774,20 +7948,20 @@
       </p:sp>
       <p:sp>
         <p:nvSpPr>
-          <p:cNvPr id="5" name="Rectangle 4"/>
+          <p:cNvPr id="6" name="Rectangle 5"/>
           <p:cNvSpPr/>
           <p:nvPr/>
         </p:nvSpPr>
         <p:spPr>
           <a:xfrm>
-            <a:off x="914400" y="2980944"/>
-            <a:ext cx="45720" cy="274320"/>
+            <a:off x="731520" y="3063240"/>
+            <a:ext cx="45720" cy="457200"/>
           </a:xfrm>
           <a:prstGeom prst="rect">
             <a:avLst/>
           </a:prstGeom>
           <a:solidFill>
-            <a:srgbClr val="FF3821"/>
+            <a:srgbClr val="00C853"/>
           </a:solidFill>
           <a:ln>
             <a:noFill/>
@@ -7817,14 +7991,14 @@
       </p:sp>
       <p:sp>
         <p:nvSpPr>
-          <p:cNvPr id="6" name="TextBox 5"/>
-          <p:cNvSpPr txBox="1"/>
-          <p:nvPr/>
-        </p:nvSpPr>
-        <p:spPr>
-          <a:xfrm>
-            <a:off x="1188720" y="2944368"/>
-            <a:ext cx="3200400" cy="347472"/>
+          <p:cNvPr id="7" name="TextBox 6"/>
+          <p:cNvSpPr txBox="1"/>
+          <p:nvPr/>
+        </p:nvSpPr>
+        <p:spPr>
+          <a:xfrm>
+            <a:off x="960120" y="3017520"/>
+            <a:ext cx="4663440" cy="457200"/>
           </a:xfrm>
           <a:prstGeom prst="rect">
             <a:avLst/>
@@ -7838,65 +8012,148 @@
           <a:lstStyle/>
           <a:p>
             <a:pPr algn="l">
-              <a:defRPr sz="1400" b="1">
-                <a:solidFill>
-                  <a:srgbClr val="FFFFFF"/>
-                </a:solidFill>
-                <a:latin typeface="Calibri"/>
-              </a:defRPr>
-            </a:pPr>
-            <a:r>
-              <a:t>Data Ingestion</a:t>
-            </a:r>
-          </a:p>
-        </p:txBody>
-      </p:sp>
-      <p:sp>
-        <p:nvSpPr>
-          <p:cNvPr id="7" name="TextBox 6"/>
-          <p:cNvSpPr txBox="1"/>
-          <p:nvPr/>
-        </p:nvSpPr>
-        <p:spPr>
-          <a:xfrm>
-            <a:off x="4572000" y="2944368"/>
-            <a:ext cx="6583680" cy="347472"/>
-          </a:xfrm>
-          <a:prstGeom prst="rect">
-            <a:avLst/>
-          </a:prstGeom>
-          <a:noFill/>
-        </p:spPr>
-        <p:txBody>
-          <a:bodyPr wrap="square">
-            <a:spAutoFit/>
-          </a:bodyPr>
-          <a:lstStyle/>
-          <a:p>
-            <a:pPr algn="l">
-              <a:defRPr sz="1300" b="0">
-                <a:solidFill>
-                  <a:srgbClr val="BBBBBB"/>
-                </a:solidFill>
-                <a:latin typeface="Calibri"/>
-              </a:defRPr>
-            </a:pPr>
-            <a:r>
-              <a:t>Auto Loader, ai_parse_document, ai_query</a:t>
-            </a:r>
-          </a:p>
-        </p:txBody>
-      </p:sp>
-      <p:sp>
-        <p:nvSpPr>
-          <p:cNvPr id="8" name="Rounded Rectangle 7"/>
+              <a:defRPr sz="1800" b="1">
+                <a:solidFill>
+                  <a:srgbClr val="00C853"/>
+                </a:solidFill>
+                <a:latin typeface="Calibri"/>
+              </a:defRPr>
+            </a:pPr>
+            <a:r>
+              <a:t>Key Topics</a:t>
+            </a:r>
+          </a:p>
+        </p:txBody>
+      </p:sp>
+      <p:sp>
+        <p:nvSpPr>
+          <p:cNvPr id="8" name="TextBox 7"/>
+          <p:cNvSpPr txBox="1"/>
+          <p:nvPr/>
+        </p:nvSpPr>
+        <p:spPr>
+          <a:xfrm>
+            <a:off x="960120" y="3566160"/>
+            <a:ext cx="4663440" cy="2560320"/>
+          </a:xfrm>
+          <a:prstGeom prst="rect">
+            <a:avLst/>
+          </a:prstGeom>
+          <a:noFill/>
+        </p:spPr>
+        <p:txBody>
+          <a:bodyPr wrap="square">
+            <a:spAutoFit/>
+          </a:bodyPr>
+          <a:lstStyle/>
+          <a:p>
+            <a:pPr>
+              <a:spcAft>
+                <a:spcPts val="600"/>
+              </a:spcAft>
+              <a:defRPr sz="1300">
+                <a:solidFill>
+                  <a:srgbClr val="BBBBBB"/>
+                </a:solidFill>
+                <a:latin typeface="Calibri"/>
+              </a:defRPr>
+            </a:pPr>
+            <a:r>
+              <a:t>  Agent Bricks: Knowledge Assistants &amp; Multi-Agent Supervisors</a:t>
+            </a:r>
+          </a:p>
+          <a:p>
+            <a:pPr>
+              <a:spcAft>
+                <a:spcPts val="600"/>
+              </a:spcAft>
+              <a:defRPr sz="1300">
+                <a:solidFill>
+                  <a:srgbClr val="BBBBBB"/>
+                </a:solidFill>
+                <a:latin typeface="Calibri"/>
+              </a:defRPr>
+            </a:pPr>
+            <a:r>
+              <a:t>  Genie Spaces: self-service SQL analytics via natural language</a:t>
+            </a:r>
+          </a:p>
+          <a:p>
+            <a:pPr>
+              <a:spcAft>
+                <a:spcPts val="600"/>
+              </a:spcAft>
+              <a:defRPr sz="1300">
+                <a:solidFill>
+                  <a:srgbClr val="BBBBBB"/>
+                </a:solidFill>
+                <a:latin typeface="Calibri"/>
+              </a:defRPr>
+            </a:pPr>
+            <a:r>
+              <a:t>  UC Functions: create tool functions for agent orchestration</a:t>
+            </a:r>
+          </a:p>
+          <a:p>
+            <a:pPr>
+              <a:spcAft>
+                <a:spcPts val="600"/>
+              </a:spcAft>
+              <a:defRPr sz="1300">
+                <a:solidFill>
+                  <a:srgbClr val="BBBBBB"/>
+                </a:solidFill>
+                <a:latin typeface="Calibri"/>
+              </a:defRPr>
+            </a:pPr>
+            <a:r>
+              <a:t>  Model Serving: deploy agents &amp; models to endpoints</a:t>
+            </a:r>
+          </a:p>
+          <a:p>
+            <a:pPr>
+              <a:spcAft>
+                <a:spcPts val="600"/>
+              </a:spcAft>
+              <a:defRPr sz="1300">
+                <a:solidFill>
+                  <a:srgbClr val="BBBBBB"/>
+                </a:solidFill>
+                <a:latin typeface="Calibri"/>
+              </a:defRPr>
+            </a:pPr>
+            <a:r>
+              <a:t>  ResponsesAgent + LangGraph custom agent pattern</a:t>
+            </a:r>
+          </a:p>
+          <a:p>
+            <a:pPr>
+              <a:spcAft>
+                <a:spcPts val="600"/>
+              </a:spcAft>
+              <a:defRPr sz="1300">
+                <a:solidFill>
+                  <a:srgbClr val="BBBBBB"/>
+                </a:solidFill>
+                <a:latin typeface="Calibri"/>
+              </a:defRPr>
+            </a:pPr>
+            <a:r>
+              <a:t>  End-to-end: approve, analyze, and shop lender rates</a:t>
+            </a:r>
+          </a:p>
+        </p:txBody>
+      </p:sp>
+      <p:sp>
+        <p:nvSpPr>
+          <p:cNvPr id="9" name="Rounded Rectangle 8"/>
           <p:cNvSpPr/>
           <p:nvPr/>
         </p:nvSpPr>
         <p:spPr>
           <a:xfrm>
-            <a:off x="731520" y="3346704"/>
-            <a:ext cx="10698480" cy="384048"/>
+            <a:off x="6217920" y="2926080"/>
+            <a:ext cx="5303520" cy="3474720"/>
           </a:xfrm>
           <a:prstGeom prst="roundRect">
             <a:avLst/>
@@ -7933,332 +8190,14 @@
       </p:sp>
       <p:sp>
         <p:nvSpPr>
-          <p:cNvPr id="9" name="Rectangle 8"/>
+          <p:cNvPr id="10" name="Rectangle 9"/>
           <p:cNvSpPr/>
           <p:nvPr/>
         </p:nvSpPr>
         <p:spPr>
           <a:xfrm>
-            <a:off x="914400" y="3401568"/>
-            <a:ext cx="45720" cy="274320"/>
-          </a:xfrm>
-          <a:prstGeom prst="rect">
-            <a:avLst/>
-          </a:prstGeom>
-          <a:solidFill>
-            <a:srgbClr val="FFB72B"/>
-          </a:solidFill>
-          <a:ln>
-            <a:noFill/>
-          </a:ln>
-        </p:spPr>
-        <p:style>
-          <a:lnRef idx="1">
-            <a:schemeClr val="accent1"/>
-          </a:lnRef>
-          <a:fillRef idx="3">
-            <a:schemeClr val="accent1"/>
-          </a:fillRef>
-          <a:effectRef idx="2">
-            <a:schemeClr val="accent1"/>
-          </a:effectRef>
-          <a:fontRef idx="minor">
-            <a:schemeClr val="lt1"/>
-          </a:fontRef>
-        </p:style>
-        <p:txBody>
-          <a:bodyPr rtlCol="0" anchor="ctr"/>
-          <a:lstStyle/>
-          <a:p>
-            <a:pPr algn="ctr"/>
-          </a:p>
-        </p:txBody>
-      </p:sp>
-      <p:sp>
-        <p:nvSpPr>
-          <p:cNvPr id="10" name="TextBox 9"/>
-          <p:cNvSpPr txBox="1"/>
-          <p:nvPr/>
-        </p:nvSpPr>
-        <p:spPr>
-          <a:xfrm>
-            <a:off x="1188720" y="3364992"/>
-            <a:ext cx="3200400" cy="347472"/>
-          </a:xfrm>
-          <a:prstGeom prst="rect">
-            <a:avLst/>
-          </a:prstGeom>
-          <a:noFill/>
-        </p:spPr>
-        <p:txBody>
-          <a:bodyPr wrap="square">
-            <a:spAutoFit/>
-          </a:bodyPr>
-          <a:lstStyle/>
-          <a:p>
-            <a:pPr algn="l">
-              <a:defRPr sz="1400" b="1">
-                <a:solidFill>
-                  <a:srgbClr val="FFFFFF"/>
-                </a:solidFill>
-                <a:latin typeface="Calibri"/>
-              </a:defRPr>
-            </a:pPr>
-            <a:r>
-              <a:t>Data Pipeline</a:t>
-            </a:r>
-          </a:p>
-        </p:txBody>
-      </p:sp>
-      <p:sp>
-        <p:nvSpPr>
-          <p:cNvPr id="11" name="TextBox 10"/>
-          <p:cNvSpPr txBox="1"/>
-          <p:nvPr/>
-        </p:nvSpPr>
-        <p:spPr>
-          <a:xfrm>
-            <a:off x="4572000" y="3364992"/>
-            <a:ext cx="6583680" cy="347472"/>
-          </a:xfrm>
-          <a:prstGeom prst="rect">
-            <a:avLst/>
-          </a:prstGeom>
-          <a:noFill/>
-        </p:spPr>
-        <p:txBody>
-          <a:bodyPr wrap="square">
-            <a:spAutoFit/>
-          </a:bodyPr>
-          <a:lstStyle/>
-          <a:p>
-            <a:pPr algn="l">
-              <a:defRPr sz="1300" b="0">
-                <a:solidFill>
-                  <a:srgbClr val="BBBBBB"/>
-                </a:solidFill>
-                <a:latin typeface="Calibri"/>
-              </a:defRPr>
-            </a:pPr>
-            <a:r>
-              <a:t>Spark Declarative Pipeline (Bronze/Silver/Gold)</a:t>
-            </a:r>
-          </a:p>
-        </p:txBody>
-      </p:sp>
-      <p:sp>
-        <p:nvSpPr>
-          <p:cNvPr id="12" name="Rounded Rectangle 11"/>
-          <p:cNvSpPr/>
-          <p:nvPr/>
-        </p:nvSpPr>
-        <p:spPr>
-          <a:xfrm>
-            <a:off x="731520" y="3767328"/>
-            <a:ext cx="10698480" cy="384048"/>
-          </a:xfrm>
-          <a:prstGeom prst="roundRect">
-            <a:avLst/>
-          </a:prstGeom>
-          <a:solidFill>
-            <a:srgbClr val="252A30"/>
-          </a:solidFill>
-          <a:ln>
-            <a:noFill/>
-          </a:ln>
-          <a:effectLst/>
-        </p:spPr>
-        <p:style>
-          <a:lnRef idx="1">
-            <a:schemeClr val="accent1"/>
-          </a:lnRef>
-          <a:fillRef idx="3">
-            <a:schemeClr val="accent1"/>
-          </a:fillRef>
-          <a:effectRef idx="2">
-            <a:schemeClr val="accent1"/>
-          </a:effectRef>
-          <a:fontRef idx="minor">
-            <a:schemeClr val="lt1"/>
-          </a:fontRef>
-        </p:style>
-        <p:txBody>
-          <a:bodyPr rtlCol="0" anchor="ctr"/>
-          <a:lstStyle/>
-          <a:p>
-            <a:pPr algn="ctr"/>
-          </a:p>
-        </p:txBody>
-      </p:sp>
-      <p:sp>
-        <p:nvSpPr>
-          <p:cNvPr id="13" name="Rectangle 12"/>
-          <p:cNvSpPr/>
-          <p:nvPr/>
-        </p:nvSpPr>
-        <p:spPr>
-          <a:xfrm>
-            <a:off x="914400" y="3822192"/>
-            <a:ext cx="45720" cy="274320"/>
-          </a:xfrm>
-          <a:prstGeom prst="rect">
-            <a:avLst/>
-          </a:prstGeom>
-          <a:solidFill>
-            <a:srgbClr val="42A5F5"/>
-          </a:solidFill>
-          <a:ln>
-            <a:noFill/>
-          </a:ln>
-        </p:spPr>
-        <p:style>
-          <a:lnRef idx="1">
-            <a:schemeClr val="accent1"/>
-          </a:lnRef>
-          <a:fillRef idx="3">
-            <a:schemeClr val="accent1"/>
-          </a:fillRef>
-          <a:effectRef idx="2">
-            <a:schemeClr val="accent1"/>
-          </a:effectRef>
-          <a:fontRef idx="minor">
-            <a:schemeClr val="lt1"/>
-          </a:fontRef>
-        </p:style>
-        <p:txBody>
-          <a:bodyPr rtlCol="0" anchor="ctr"/>
-          <a:lstStyle/>
-          <a:p>
-            <a:pPr algn="ctr"/>
-          </a:p>
-        </p:txBody>
-      </p:sp>
-      <p:sp>
-        <p:nvSpPr>
-          <p:cNvPr id="14" name="TextBox 13"/>
-          <p:cNvSpPr txBox="1"/>
-          <p:nvPr/>
-        </p:nvSpPr>
-        <p:spPr>
-          <a:xfrm>
-            <a:off x="1188720" y="3785616"/>
-            <a:ext cx="3200400" cy="347472"/>
-          </a:xfrm>
-          <a:prstGeom prst="rect">
-            <a:avLst/>
-          </a:prstGeom>
-          <a:noFill/>
-        </p:spPr>
-        <p:txBody>
-          <a:bodyPr wrap="square">
-            <a:spAutoFit/>
-          </a:bodyPr>
-          <a:lstStyle/>
-          <a:p>
-            <a:pPr algn="l">
-              <a:defRPr sz="1400" b="1">
-                <a:solidFill>
-                  <a:srgbClr val="FFFFFF"/>
-                </a:solidFill>
-                <a:latin typeface="Calibri"/>
-              </a:defRPr>
-            </a:pPr>
-            <a:r>
-              <a:t>Feature Store</a:t>
-            </a:r>
-          </a:p>
-        </p:txBody>
-      </p:sp>
-      <p:sp>
-        <p:nvSpPr>
-          <p:cNvPr id="15" name="TextBox 14"/>
-          <p:cNvSpPr txBox="1"/>
-          <p:nvPr/>
-        </p:nvSpPr>
-        <p:spPr>
-          <a:xfrm>
-            <a:off x="4572000" y="3785616"/>
-            <a:ext cx="6583680" cy="347472"/>
-          </a:xfrm>
-          <a:prstGeom prst="rect">
-            <a:avLst/>
-          </a:prstGeom>
-          <a:noFill/>
-        </p:spPr>
-        <p:txBody>
-          <a:bodyPr wrap="square">
-            <a:spAutoFit/>
-          </a:bodyPr>
-          <a:lstStyle/>
-          <a:p>
-            <a:pPr algn="l">
-              <a:defRPr sz="1300" b="0">
-                <a:solidFill>
-                  <a:srgbClr val="BBBBBB"/>
-                </a:solidFill>
-                <a:latin typeface="Calibri"/>
-              </a:defRPr>
-            </a:pPr>
-            <a:r>
-              <a:t>Feature table + on-demand UC functions</a:t>
-            </a:r>
-          </a:p>
-        </p:txBody>
-      </p:sp>
-      <p:sp>
-        <p:nvSpPr>
-          <p:cNvPr id="16" name="Rounded Rectangle 15"/>
-          <p:cNvSpPr/>
-          <p:nvPr/>
-        </p:nvSpPr>
-        <p:spPr>
-          <a:xfrm>
-            <a:off x="731520" y="4187952"/>
-            <a:ext cx="10698480" cy="384048"/>
-          </a:xfrm>
-          <a:prstGeom prst="roundRect">
-            <a:avLst/>
-          </a:prstGeom>
-          <a:solidFill>
-            <a:srgbClr val="252A30"/>
-          </a:solidFill>
-          <a:ln>
-            <a:noFill/>
-          </a:ln>
-          <a:effectLst/>
-        </p:spPr>
-        <p:style>
-          <a:lnRef idx="1">
-            <a:schemeClr val="accent1"/>
-          </a:lnRef>
-          <a:fillRef idx="3">
-            <a:schemeClr val="accent1"/>
-          </a:fillRef>
-          <a:effectRef idx="2">
-            <a:schemeClr val="accent1"/>
-          </a:effectRef>
-          <a:fontRef idx="minor">
-            <a:schemeClr val="lt1"/>
-          </a:fontRef>
-        </p:style>
-        <p:txBody>
-          <a:bodyPr rtlCol="0" anchor="ctr"/>
-          <a:lstStyle/>
-          <a:p>
-            <a:pPr algn="ctr"/>
-          </a:p>
-        </p:txBody>
-      </p:sp>
-      <p:sp>
-        <p:nvSpPr>
-          <p:cNvPr id="17" name="Rectangle 16"/>
-          <p:cNvSpPr/>
-          <p:nvPr/>
-        </p:nvSpPr>
-        <p:spPr>
-          <a:xfrm>
-            <a:off x="914400" y="4242816"/>
-            <a:ext cx="45720" cy="274320"/>
+            <a:off x="6400800" y="3063240"/>
+            <a:ext cx="45720" cy="457200"/>
           </a:xfrm>
           <a:prstGeom prst="rect">
             <a:avLst/>
@@ -8294,14 +8233,14 @@
       </p:sp>
       <p:sp>
         <p:nvSpPr>
-          <p:cNvPr id="18" name="TextBox 17"/>
-          <p:cNvSpPr txBox="1"/>
-          <p:nvPr/>
-        </p:nvSpPr>
-        <p:spPr>
-          <a:xfrm>
-            <a:off x="1188720" y="4206240"/>
-            <a:ext cx="3200400" cy="347472"/>
+          <p:cNvPr id="11" name="TextBox 10"/>
+          <p:cNvSpPr txBox="1"/>
+          <p:nvPr/>
+        </p:nvSpPr>
+        <p:spPr>
+          <a:xfrm>
+            <a:off x="6629400" y="3017520"/>
+            <a:ext cx="4663440" cy="457200"/>
           </a:xfrm>
           <a:prstGeom prst="rect">
             <a:avLst/>
@@ -8315,846 +8254,198 @@
           <a:lstStyle/>
           <a:p>
             <a:pPr algn="l">
-              <a:defRPr sz="1400" b="1">
-                <a:solidFill>
-                  <a:srgbClr val="FFFFFF"/>
-                </a:solidFill>
-                <a:latin typeface="Calibri"/>
-              </a:defRPr>
-            </a:pPr>
-            <a:r>
-              <a:t>ML Training</a:t>
-            </a:r>
-          </a:p>
-        </p:txBody>
-      </p:sp>
-      <p:sp>
-        <p:nvSpPr>
-          <p:cNvPr id="19" name="TextBox 18"/>
-          <p:cNvSpPr txBox="1"/>
-          <p:nvPr/>
-        </p:nvSpPr>
-        <p:spPr>
-          <a:xfrm>
-            <a:off x="4572000" y="4206240"/>
-            <a:ext cx="6583680" cy="347472"/>
-          </a:xfrm>
-          <a:prstGeom prst="rect">
-            <a:avLst/>
-          </a:prstGeom>
-          <a:noFill/>
-        </p:spPr>
-        <p:txBody>
-          <a:bodyPr wrap="square">
-            <a:spAutoFit/>
-          </a:bodyPr>
-          <a:lstStyle/>
-          <a:p>
-            <a:pPr algn="l">
-              <a:defRPr sz="1300" b="0">
-                <a:solidFill>
-                  <a:srgbClr val="BBBBBB"/>
-                </a:solidFill>
-                <a:latin typeface="Calibri"/>
-              </a:defRPr>
-            </a:pPr>
-            <a:r>
-              <a:t>Optuna HPO + pyfunc wrapper with business rules</a:t>
-            </a:r>
-          </a:p>
-        </p:txBody>
-      </p:sp>
-      <p:sp>
-        <p:nvSpPr>
-          <p:cNvPr id="20" name="Rounded Rectangle 19"/>
-          <p:cNvSpPr/>
-          <p:nvPr/>
-        </p:nvSpPr>
-        <p:spPr>
-          <a:xfrm>
-            <a:off x="731520" y="4608576"/>
-            <a:ext cx="10698480" cy="384048"/>
-          </a:xfrm>
-          <a:prstGeom prst="roundRect">
-            <a:avLst/>
-          </a:prstGeom>
-          <a:solidFill>
-            <a:srgbClr val="252A30"/>
-          </a:solidFill>
-          <a:ln>
-            <a:noFill/>
-          </a:ln>
-          <a:effectLst/>
-        </p:spPr>
-        <p:style>
-          <a:lnRef idx="1">
-            <a:schemeClr val="accent1"/>
-          </a:lnRef>
-          <a:fillRef idx="3">
-            <a:schemeClr val="accent1"/>
-          </a:fillRef>
-          <a:effectRef idx="2">
-            <a:schemeClr val="accent1"/>
-          </a:effectRef>
-          <a:fontRef idx="minor">
-            <a:schemeClr val="lt1"/>
-          </a:fontRef>
-        </p:style>
-        <p:txBody>
-          <a:bodyPr rtlCol="0" anchor="ctr"/>
-          <a:lstStyle/>
-          <a:p>
-            <a:pPr algn="ctr"/>
-          </a:p>
-        </p:txBody>
-      </p:sp>
-      <p:sp>
-        <p:nvSpPr>
-          <p:cNvPr id="21" name="Rectangle 20"/>
-          <p:cNvSpPr/>
-          <p:nvPr/>
-        </p:nvSpPr>
-        <p:spPr>
-          <a:xfrm>
-            <a:off x="914400" y="4663440"/>
-            <a:ext cx="45720" cy="274320"/>
-          </a:xfrm>
-          <a:prstGeom prst="rect">
-            <a:avLst/>
-          </a:prstGeom>
-          <a:solidFill>
-            <a:srgbClr val="FFFFFF"/>
-          </a:solidFill>
-          <a:ln>
-            <a:noFill/>
-          </a:ln>
-        </p:spPr>
-        <p:style>
-          <a:lnRef idx="1">
-            <a:schemeClr val="accent1"/>
-          </a:lnRef>
-          <a:fillRef idx="3">
-            <a:schemeClr val="accent1"/>
-          </a:fillRef>
-          <a:effectRef idx="2">
-            <a:schemeClr val="accent1"/>
-          </a:effectRef>
-          <a:fontRef idx="minor">
-            <a:schemeClr val="lt1"/>
-          </a:fontRef>
-        </p:style>
-        <p:txBody>
-          <a:bodyPr rtlCol="0" anchor="ctr"/>
-          <a:lstStyle/>
-          <a:p>
-            <a:pPr algn="ctr"/>
-          </a:p>
-        </p:txBody>
-      </p:sp>
-      <p:sp>
-        <p:nvSpPr>
-          <p:cNvPr id="22" name="TextBox 21"/>
-          <p:cNvSpPr txBox="1"/>
-          <p:nvPr/>
-        </p:nvSpPr>
-        <p:spPr>
-          <a:xfrm>
-            <a:off x="1188720" y="4626864"/>
-            <a:ext cx="3200400" cy="347472"/>
-          </a:xfrm>
-          <a:prstGeom prst="rect">
-            <a:avLst/>
-          </a:prstGeom>
-          <a:noFill/>
-        </p:spPr>
-        <p:txBody>
-          <a:bodyPr wrap="square">
-            <a:spAutoFit/>
-          </a:bodyPr>
-          <a:lstStyle/>
-          <a:p>
-            <a:pPr algn="l">
-              <a:defRPr sz="1400" b="1">
-                <a:solidFill>
-                  <a:srgbClr val="FFFFFF"/>
-                </a:solidFill>
-                <a:latin typeface="Calibri"/>
-              </a:defRPr>
-            </a:pPr>
-            <a:r>
-              <a:t>Serving</a:t>
-            </a:r>
-          </a:p>
-        </p:txBody>
-      </p:sp>
-      <p:sp>
-        <p:nvSpPr>
-          <p:cNvPr id="23" name="TextBox 22"/>
-          <p:cNvSpPr txBox="1"/>
-          <p:nvPr/>
-        </p:nvSpPr>
-        <p:spPr>
-          <a:xfrm>
-            <a:off x="4572000" y="4626864"/>
-            <a:ext cx="6583680" cy="347472"/>
-          </a:xfrm>
-          <a:prstGeom prst="rect">
-            <a:avLst/>
-          </a:prstGeom>
-          <a:noFill/>
-        </p:spPr>
-        <p:txBody>
-          <a:bodyPr wrap="square">
-            <a:spAutoFit/>
-          </a:bodyPr>
-          <a:lstStyle/>
-          <a:p>
-            <a:pPr algn="l">
-              <a:defRPr sz="1300" b="0">
-                <a:solidFill>
-                  <a:srgbClr val="BBBBBB"/>
-                </a:solidFill>
-                <a:latin typeface="Calibri"/>
-              </a:defRPr>
-            </a:pPr>
-            <a:r>
-              <a:t>Model Serving endpoint + Online Feature Store</a:t>
-            </a:r>
-          </a:p>
-        </p:txBody>
-      </p:sp>
-      <p:sp>
-        <p:nvSpPr>
-          <p:cNvPr id="24" name="Rounded Rectangle 23"/>
-          <p:cNvSpPr/>
-          <p:nvPr/>
-        </p:nvSpPr>
-        <p:spPr>
-          <a:xfrm>
-            <a:off x="731520" y="5029200"/>
-            <a:ext cx="10698480" cy="384048"/>
-          </a:xfrm>
-          <a:prstGeom prst="roundRect">
-            <a:avLst/>
-          </a:prstGeom>
-          <a:solidFill>
-            <a:srgbClr val="252A30"/>
-          </a:solidFill>
-          <a:ln>
-            <a:noFill/>
-          </a:ln>
-          <a:effectLst/>
-        </p:spPr>
-        <p:style>
-          <a:lnRef idx="1">
-            <a:schemeClr val="accent1"/>
-          </a:lnRef>
-          <a:fillRef idx="3">
-            <a:schemeClr val="accent1"/>
-          </a:fillRef>
-          <a:effectRef idx="2">
-            <a:schemeClr val="accent1"/>
-          </a:effectRef>
-          <a:fontRef idx="minor">
-            <a:schemeClr val="lt1"/>
-          </a:fontRef>
-        </p:style>
-        <p:txBody>
-          <a:bodyPr rtlCol="0" anchor="ctr"/>
-          <a:lstStyle/>
-          <a:p>
-            <a:pPr algn="ctr"/>
-          </a:p>
-        </p:txBody>
-      </p:sp>
-      <p:sp>
-        <p:nvSpPr>
-          <p:cNvPr id="25" name="Rectangle 24"/>
-          <p:cNvSpPr/>
-          <p:nvPr/>
-        </p:nvSpPr>
-        <p:spPr>
-          <a:xfrm>
-            <a:off x="914400" y="5084064"/>
-            <a:ext cx="45720" cy="274320"/>
-          </a:xfrm>
-          <a:prstGeom prst="rect">
-            <a:avLst/>
-          </a:prstGeom>
-          <a:solidFill>
-            <a:srgbClr val="888888"/>
-          </a:solidFill>
-          <a:ln>
-            <a:noFill/>
-          </a:ln>
-        </p:spPr>
-        <p:style>
-          <a:lnRef idx="1">
-            <a:schemeClr val="accent1"/>
-          </a:lnRef>
-          <a:fillRef idx="3">
-            <a:schemeClr val="accent1"/>
-          </a:fillRef>
-          <a:effectRef idx="2">
-            <a:schemeClr val="accent1"/>
-          </a:effectRef>
-          <a:fontRef idx="minor">
-            <a:schemeClr val="lt1"/>
-          </a:fontRef>
-        </p:style>
-        <p:txBody>
-          <a:bodyPr rtlCol="0" anchor="ctr"/>
-          <a:lstStyle/>
-          <a:p>
-            <a:pPr algn="ctr"/>
-          </a:p>
-        </p:txBody>
-      </p:sp>
-      <p:sp>
-        <p:nvSpPr>
-          <p:cNvPr id="26" name="TextBox 25"/>
-          <p:cNvSpPr txBox="1"/>
-          <p:nvPr/>
-        </p:nvSpPr>
-        <p:spPr>
-          <a:xfrm>
-            <a:off x="1188720" y="5047488"/>
-            <a:ext cx="3200400" cy="347472"/>
-          </a:xfrm>
-          <a:prstGeom prst="rect">
-            <a:avLst/>
-          </a:prstGeom>
-          <a:noFill/>
-        </p:spPr>
-        <p:txBody>
-          <a:bodyPr wrap="square">
-            <a:spAutoFit/>
-          </a:bodyPr>
-          <a:lstStyle/>
-          <a:p>
-            <a:pPr algn="l">
-              <a:defRPr sz="1400" b="1">
-                <a:solidFill>
-                  <a:srgbClr val="FFFFFF"/>
-                </a:solidFill>
-                <a:latin typeface="Calibri"/>
-              </a:defRPr>
-            </a:pPr>
-            <a:r>
-              <a:t>Monitoring</a:t>
-            </a:r>
-          </a:p>
-        </p:txBody>
-      </p:sp>
-      <p:sp>
-        <p:nvSpPr>
-          <p:cNvPr id="27" name="TextBox 26"/>
-          <p:cNvSpPr txBox="1"/>
-          <p:nvPr/>
-        </p:nvSpPr>
-        <p:spPr>
-          <a:xfrm>
-            <a:off x="4572000" y="5047488"/>
-            <a:ext cx="6583680" cy="347472"/>
-          </a:xfrm>
-          <a:prstGeom prst="rect">
-            <a:avLst/>
-          </a:prstGeom>
-          <a:noFill/>
-        </p:spPr>
-        <p:txBody>
-          <a:bodyPr wrap="square">
-            <a:spAutoFit/>
-          </a:bodyPr>
-          <a:lstStyle/>
-          <a:p>
-            <a:pPr algn="l">
-              <a:defRPr sz="1300" b="0">
-                <a:solidFill>
-                  <a:srgbClr val="BBBBBB"/>
-                </a:solidFill>
-                <a:latin typeface="Calibri"/>
-              </a:defRPr>
-            </a:pPr>
-            <a:r>
-              <a:t>Lakehouse Monitoring + auto-retrain on drift</a:t>
-            </a:r>
-          </a:p>
-        </p:txBody>
-      </p:sp>
-      <p:sp>
-        <p:nvSpPr>
-          <p:cNvPr id="28" name="Rounded Rectangle 27"/>
-          <p:cNvSpPr/>
-          <p:nvPr/>
-        </p:nvSpPr>
-        <p:spPr>
-          <a:xfrm>
-            <a:off x="731520" y="5449824"/>
-            <a:ext cx="10698480" cy="384048"/>
-          </a:xfrm>
-          <a:prstGeom prst="roundRect">
-            <a:avLst/>
-          </a:prstGeom>
-          <a:solidFill>
-            <a:srgbClr val="252A30"/>
-          </a:solidFill>
-          <a:ln>
-            <a:noFill/>
-          </a:ln>
-          <a:effectLst/>
-        </p:spPr>
-        <p:style>
-          <a:lnRef idx="1">
-            <a:schemeClr val="accent1"/>
-          </a:lnRef>
-          <a:fillRef idx="3">
-            <a:schemeClr val="accent1"/>
-          </a:fillRef>
-          <a:effectRef idx="2">
-            <a:schemeClr val="accent1"/>
-          </a:effectRef>
-          <a:fontRef idx="minor">
-            <a:schemeClr val="lt1"/>
-          </a:fontRef>
-        </p:style>
-        <p:txBody>
-          <a:bodyPr rtlCol="0" anchor="ctr"/>
-          <a:lstStyle/>
-          <a:p>
-            <a:pPr algn="ctr"/>
-          </a:p>
-        </p:txBody>
-      </p:sp>
-      <p:sp>
-        <p:nvSpPr>
-          <p:cNvPr id="29" name="Rectangle 28"/>
-          <p:cNvSpPr/>
-          <p:nvPr/>
-        </p:nvSpPr>
-        <p:spPr>
-          <a:xfrm>
-            <a:off x="914400" y="5504688"/>
-            <a:ext cx="45720" cy="274320"/>
-          </a:xfrm>
-          <a:prstGeom prst="rect">
-            <a:avLst/>
-          </a:prstGeom>
-          <a:solidFill>
-            <a:srgbClr val="42A5F5"/>
-          </a:solidFill>
-          <a:ln>
-            <a:noFill/>
-          </a:ln>
-        </p:spPr>
-        <p:style>
-          <a:lnRef idx="1">
-            <a:schemeClr val="accent1"/>
-          </a:lnRef>
-          <a:fillRef idx="3">
-            <a:schemeClr val="accent1"/>
-          </a:fillRef>
-          <a:effectRef idx="2">
-            <a:schemeClr val="accent1"/>
-          </a:effectRef>
-          <a:fontRef idx="minor">
-            <a:schemeClr val="lt1"/>
-          </a:fontRef>
-        </p:style>
-        <p:txBody>
-          <a:bodyPr rtlCol="0" anchor="ctr"/>
-          <a:lstStyle/>
-          <a:p>
-            <a:pPr algn="ctr"/>
-          </a:p>
-        </p:txBody>
-      </p:sp>
-      <p:sp>
-        <p:nvSpPr>
-          <p:cNvPr id="30" name="TextBox 29"/>
-          <p:cNvSpPr txBox="1"/>
-          <p:nvPr/>
-        </p:nvSpPr>
-        <p:spPr>
-          <a:xfrm>
-            <a:off x="1188720" y="5468112"/>
-            <a:ext cx="3200400" cy="347472"/>
-          </a:xfrm>
-          <a:prstGeom prst="rect">
-            <a:avLst/>
-          </a:prstGeom>
-          <a:noFill/>
-        </p:spPr>
-        <p:txBody>
-          <a:bodyPr wrap="square">
-            <a:spAutoFit/>
-          </a:bodyPr>
-          <a:lstStyle/>
-          <a:p>
-            <a:pPr algn="l">
-              <a:defRPr sz="1400" b="1">
-                <a:solidFill>
-                  <a:srgbClr val="FFFFFF"/>
-                </a:solidFill>
-                <a:latin typeface="Calibri"/>
-              </a:defRPr>
-            </a:pPr>
-            <a:r>
-              <a:t>Analytics</a:t>
-            </a:r>
-          </a:p>
-        </p:txBody>
-      </p:sp>
-      <p:sp>
-        <p:nvSpPr>
-          <p:cNvPr id="31" name="TextBox 30"/>
-          <p:cNvSpPr txBox="1"/>
-          <p:nvPr/>
-        </p:nvSpPr>
-        <p:spPr>
-          <a:xfrm>
-            <a:off x="4572000" y="5468112"/>
-            <a:ext cx="6583680" cy="347472"/>
-          </a:xfrm>
-          <a:prstGeom prst="rect">
-            <a:avLst/>
-          </a:prstGeom>
-          <a:noFill/>
-        </p:spPr>
-        <p:txBody>
-          <a:bodyPr wrap="square">
-            <a:spAutoFit/>
-          </a:bodyPr>
-          <a:lstStyle/>
-          <a:p>
-            <a:pPr algn="l">
-              <a:defRPr sz="1300" b="0">
-                <a:solidFill>
-                  <a:srgbClr val="BBBBBB"/>
-                </a:solidFill>
-                <a:latin typeface="Calibri"/>
-              </a:defRPr>
-            </a:pPr>
-            <a:r>
-              <a:t>Genie Space for self-service SQL</a:t>
-            </a:r>
-          </a:p>
-        </p:txBody>
-      </p:sp>
-      <p:sp>
-        <p:nvSpPr>
-          <p:cNvPr id="32" name="Rounded Rectangle 31"/>
-          <p:cNvSpPr/>
-          <p:nvPr/>
-        </p:nvSpPr>
-        <p:spPr>
-          <a:xfrm>
-            <a:off x="731520" y="5870448"/>
-            <a:ext cx="10698480" cy="384048"/>
-          </a:xfrm>
-          <a:prstGeom prst="roundRect">
-            <a:avLst/>
-          </a:prstGeom>
-          <a:solidFill>
-            <a:srgbClr val="252A30"/>
-          </a:solidFill>
-          <a:ln>
-            <a:noFill/>
-          </a:ln>
-          <a:effectLst/>
-        </p:spPr>
-        <p:style>
-          <a:lnRef idx="1">
-            <a:schemeClr val="accent1"/>
-          </a:lnRef>
-          <a:fillRef idx="3">
-            <a:schemeClr val="accent1"/>
-          </a:fillRef>
-          <a:effectRef idx="2">
-            <a:schemeClr val="accent1"/>
-          </a:effectRef>
-          <a:fontRef idx="minor">
-            <a:schemeClr val="lt1"/>
-          </a:fontRef>
-        </p:style>
-        <p:txBody>
-          <a:bodyPr rtlCol="0" anchor="ctr"/>
-          <a:lstStyle/>
-          <a:p>
-            <a:pPr algn="ctr"/>
-          </a:p>
-        </p:txBody>
-      </p:sp>
-      <p:sp>
-        <p:nvSpPr>
-          <p:cNvPr id="33" name="Rectangle 32"/>
-          <p:cNvSpPr/>
-          <p:nvPr/>
-        </p:nvSpPr>
-        <p:spPr>
-          <a:xfrm>
-            <a:off x="914400" y="5925312"/>
-            <a:ext cx="45720" cy="274320"/>
-          </a:xfrm>
-          <a:prstGeom prst="rect">
-            <a:avLst/>
-          </a:prstGeom>
-          <a:solidFill>
-            <a:srgbClr val="00C853"/>
-          </a:solidFill>
-          <a:ln>
-            <a:noFill/>
-          </a:ln>
-        </p:spPr>
-        <p:style>
-          <a:lnRef idx="1">
-            <a:schemeClr val="accent1"/>
-          </a:lnRef>
-          <a:fillRef idx="3">
-            <a:schemeClr val="accent1"/>
-          </a:fillRef>
-          <a:effectRef idx="2">
-            <a:schemeClr val="accent1"/>
-          </a:effectRef>
-          <a:fontRef idx="minor">
-            <a:schemeClr val="lt1"/>
-          </a:fontRef>
-        </p:style>
-        <p:txBody>
-          <a:bodyPr rtlCol="0" anchor="ctr"/>
-          <a:lstStyle/>
-          <a:p>
-            <a:pPr algn="ctr"/>
-          </a:p>
-        </p:txBody>
-      </p:sp>
-      <p:sp>
-        <p:nvSpPr>
-          <p:cNvPr id="34" name="TextBox 33"/>
-          <p:cNvSpPr txBox="1"/>
-          <p:nvPr/>
-        </p:nvSpPr>
-        <p:spPr>
-          <a:xfrm>
-            <a:off x="1188720" y="5888736"/>
-            <a:ext cx="3200400" cy="347472"/>
-          </a:xfrm>
-          <a:prstGeom prst="rect">
-            <a:avLst/>
-          </a:prstGeom>
-          <a:noFill/>
-        </p:spPr>
-        <p:txBody>
-          <a:bodyPr wrap="square">
-            <a:spAutoFit/>
-          </a:bodyPr>
-          <a:lstStyle/>
-          <a:p>
-            <a:pPr algn="l">
-              <a:defRPr sz="1400" b="1">
-                <a:solidFill>
-                  <a:srgbClr val="FFFFFF"/>
-                </a:solidFill>
-                <a:latin typeface="Calibri"/>
-              </a:defRPr>
-            </a:pPr>
-            <a:r>
-              <a:t>Rate Shopping</a:t>
-            </a:r>
-          </a:p>
-        </p:txBody>
-      </p:sp>
-      <p:sp>
-        <p:nvSpPr>
-          <p:cNvPr id="35" name="TextBox 34"/>
-          <p:cNvSpPr txBox="1"/>
-          <p:nvPr/>
-        </p:nvSpPr>
-        <p:spPr>
-          <a:xfrm>
-            <a:off x="4572000" y="5888736"/>
-            <a:ext cx="6583680" cy="347472"/>
-          </a:xfrm>
-          <a:prstGeom prst="rect">
-            <a:avLst/>
-          </a:prstGeom>
-          <a:noFill/>
-        </p:spPr>
-        <p:txBody>
-          <a:bodyPr wrap="square">
-            <a:spAutoFit/>
-          </a:bodyPr>
-          <a:lstStyle/>
-          <a:p>
-            <a:pPr algn="l">
-              <a:defRPr sz="1300" b="0">
-                <a:solidFill>
-                  <a:srgbClr val="BBBBBB"/>
-                </a:solidFill>
-                <a:latin typeface="Calibri"/>
-              </a:defRPr>
-            </a:pPr>
-            <a:r>
-              <a:t>ResponsesAgent + LangGraph + UC Functions</a:t>
-            </a:r>
-          </a:p>
-        </p:txBody>
-      </p:sp>
-      <p:sp>
-        <p:nvSpPr>
-          <p:cNvPr id="36" name="Rounded Rectangle 35"/>
-          <p:cNvSpPr/>
-          <p:nvPr/>
-        </p:nvSpPr>
-        <p:spPr>
-          <a:xfrm>
-            <a:off x="731520" y="6291072"/>
-            <a:ext cx="10698480" cy="384048"/>
-          </a:xfrm>
-          <a:prstGeom prst="roundRect">
-            <a:avLst/>
-          </a:prstGeom>
-          <a:solidFill>
-            <a:srgbClr val="252A30"/>
-          </a:solidFill>
-          <a:ln>
-            <a:noFill/>
-          </a:ln>
-          <a:effectLst/>
-        </p:spPr>
-        <p:style>
-          <a:lnRef idx="1">
-            <a:schemeClr val="accent1"/>
-          </a:lnRef>
-          <a:fillRef idx="3">
-            <a:schemeClr val="accent1"/>
-          </a:fillRef>
-          <a:effectRef idx="2">
-            <a:schemeClr val="accent1"/>
-          </a:effectRef>
-          <a:fontRef idx="minor">
-            <a:schemeClr val="lt1"/>
-          </a:fontRef>
-        </p:style>
-        <p:txBody>
-          <a:bodyPr rtlCol="0" anchor="ctr"/>
-          <a:lstStyle/>
-          <a:p>
-            <a:pPr algn="ctr"/>
-          </a:p>
-        </p:txBody>
-      </p:sp>
-      <p:sp>
-        <p:nvSpPr>
-          <p:cNvPr id="37" name="Rectangle 36"/>
-          <p:cNvSpPr/>
-          <p:nvPr/>
-        </p:nvSpPr>
-        <p:spPr>
-          <a:xfrm>
-            <a:off x="914400" y="6345936"/>
-            <a:ext cx="45720" cy="274320"/>
-          </a:xfrm>
-          <a:prstGeom prst="rect">
-            <a:avLst/>
-          </a:prstGeom>
-          <a:solidFill>
-            <a:srgbClr val="FF3821"/>
-          </a:solidFill>
-          <a:ln>
-            <a:noFill/>
-          </a:ln>
-        </p:spPr>
-        <p:style>
-          <a:lnRef idx="1">
-            <a:schemeClr val="accent1"/>
-          </a:lnRef>
-          <a:fillRef idx="3">
-            <a:schemeClr val="accent1"/>
-          </a:fillRef>
-          <a:effectRef idx="2">
-            <a:schemeClr val="accent1"/>
-          </a:effectRef>
-          <a:fontRef idx="minor">
-            <a:schemeClr val="lt1"/>
-          </a:fontRef>
-        </p:style>
-        <p:txBody>
-          <a:bodyPr rtlCol="0" anchor="ctr"/>
-          <a:lstStyle/>
-          <a:p>
-            <a:pPr algn="ctr"/>
-          </a:p>
-        </p:txBody>
-      </p:sp>
-      <p:sp>
-        <p:nvSpPr>
-          <p:cNvPr id="38" name="TextBox 37"/>
-          <p:cNvSpPr txBox="1"/>
-          <p:nvPr/>
-        </p:nvSpPr>
-        <p:spPr>
-          <a:xfrm>
-            <a:off x="1188720" y="6309360"/>
-            <a:ext cx="3200400" cy="347472"/>
-          </a:xfrm>
-          <a:prstGeom prst="rect">
-            <a:avLst/>
-          </a:prstGeom>
-          <a:noFill/>
-        </p:spPr>
-        <p:txBody>
-          <a:bodyPr wrap="square">
-            <a:spAutoFit/>
-          </a:bodyPr>
-          <a:lstStyle/>
-          <a:p>
-            <a:pPr algn="l">
-              <a:defRPr sz="1400" b="1">
-                <a:solidFill>
-                  <a:srgbClr val="FFFFFF"/>
-                </a:solidFill>
-                <a:latin typeface="Calibri"/>
-              </a:defRPr>
-            </a:pPr>
-            <a:r>
-              <a:t>Orchestration</a:t>
-            </a:r>
-          </a:p>
-        </p:txBody>
-      </p:sp>
-      <p:sp>
-        <p:nvSpPr>
-          <p:cNvPr id="39" name="TextBox 38"/>
-          <p:cNvSpPr txBox="1"/>
-          <p:nvPr/>
-        </p:nvSpPr>
-        <p:spPr>
-          <a:xfrm>
-            <a:off x="4572000" y="6309360"/>
-            <a:ext cx="6583680" cy="347472"/>
-          </a:xfrm>
-          <a:prstGeom prst="rect">
-            <a:avLst/>
-          </a:prstGeom>
-          <a:noFill/>
-        </p:spPr>
-        <p:txBody>
-          <a:bodyPr wrap="square">
-            <a:spAutoFit/>
-          </a:bodyPr>
-          <a:lstStyle/>
-          <a:p>
-            <a:pPr algn="l">
-              <a:defRPr sz="1300" b="0">
-                <a:solidFill>
-                  <a:srgbClr val="BBBBBB"/>
-                </a:solidFill>
-                <a:latin typeface="Calibri"/>
-              </a:defRPr>
-            </a:pPr>
-            <a:r>
-              <a:t>Multi-Agent Supervisor (MAS)</a:t>
+              <a:defRPr sz="1800" b="1">
+                <a:solidFill>
+                  <a:srgbClr val="00C853"/>
+                </a:solidFill>
+                <a:latin typeface="Calibri"/>
+              </a:defRPr>
+            </a:pPr>
+            <a:r>
+              <a:t>Notebooks &amp; Components</a:t>
+            </a:r>
+          </a:p>
+        </p:txBody>
+      </p:sp>
+      <p:sp>
+        <p:nvSpPr>
+          <p:cNvPr id="12" name="TextBox 11"/>
+          <p:cNvSpPr txBox="1"/>
+          <p:nvPr/>
+        </p:nvSpPr>
+        <p:spPr>
+          <a:xfrm>
+            <a:off x="6629400" y="3566160"/>
+            <a:ext cx="4663440" cy="2560320"/>
+          </a:xfrm>
+          <a:prstGeom prst="rect">
+            <a:avLst/>
+          </a:prstGeom>
+          <a:noFill/>
+        </p:spPr>
+        <p:txBody>
+          <a:bodyPr wrap="square">
+            <a:spAutoFit/>
+          </a:bodyPr>
+          <a:lstStyle/>
+          <a:p>
+            <a:pPr>
+              <a:spcAft>
+                <a:spcPts val="600"/>
+              </a:spcAft>
+              <a:defRPr sz="1200">
+                <a:solidFill>
+                  <a:srgbClr val="BBBBBB"/>
+                </a:solidFill>
+                <a:latin typeface="Calibri"/>
+              </a:defRPr>
+            </a:pPr>
+            <a:r>
+              <a:t>  09a_generate_lender_programs.py</a:t>
+            </a:r>
+          </a:p>
+          <a:p>
+            <a:pPr>
+              <a:spcAft>
+                <a:spcPts val="600"/>
+              </a:spcAft>
+              <a:defRPr sz="1200">
+                <a:solidFill>
+                  <a:srgbClr val="BBBBBB"/>
+                </a:solidFill>
+                <a:latin typeface="Calibri"/>
+              </a:defRPr>
+            </a:pPr>
+            <a:r>
+              <a:t>  09b_setup_agent_bricks.py</a:t>
+            </a:r>
+          </a:p>
+          <a:p>
+            <a:pPr>
+              <a:spcAft>
+                <a:spcPts val="600"/>
+              </a:spcAft>
+              <a:defRPr sz="1200">
+                <a:solidFill>
+                  <a:srgbClr val="BBBBBB"/>
+                </a:solidFill>
+                <a:latin typeface="Calibri"/>
+              </a:defRPr>
+            </a:pPr>
+            <a:r>
+              <a:t>  src/agent/agent.py         (ResponsesAgent)</a:t>
+            </a:r>
+          </a:p>
+          <a:p>
+            <a:pPr>
+              <a:spcAft>
+                <a:spcPts val="600"/>
+              </a:spcAft>
+              <a:defRPr sz="1200">
+                <a:solidFill>
+                  <a:srgbClr val="BBBBBB"/>
+                </a:solidFill>
+                <a:latin typeface="Calibri"/>
+              </a:defRPr>
+            </a:pPr>
+            <a:r>
+              <a:t>  src/agent/test_agent.py    (test scenarios)</a:t>
+            </a:r>
+          </a:p>
+          <a:p>
+            <a:pPr>
+              <a:spcAft>
+                <a:spcPts val="600"/>
+              </a:spcAft>
+              <a:defRPr sz="1200">
+                <a:solidFill>
+                  <a:srgbClr val="BBBBBB"/>
+                </a:solidFill>
+                <a:latin typeface="Calibri"/>
+              </a:defRPr>
+            </a:pPr>
+            <a:r>
+              <a:t>  src/agent/log_model.py     (MLflow registration)</a:t>
+            </a:r>
+          </a:p>
+          <a:p>
+            <a:pPr>
+              <a:spcAft>
+                <a:spcPts val="600"/>
+              </a:spcAft>
+              <a:defRPr sz="1200">
+                <a:solidFill>
+                  <a:srgbClr val="BBBBBB"/>
+                </a:solidFill>
+                <a:latin typeface="Calibri"/>
+              </a:defRPr>
+            </a:pPr>
+            <a:r>
+              <a:t>  </a:t>
+            </a:r>
+          </a:p>
+          <a:p>
+            <a:pPr>
+              <a:spcAft>
+                <a:spcPts val="600"/>
+              </a:spcAft>
+              <a:defRPr sz="1200">
+                <a:solidFill>
+                  <a:srgbClr val="BBBBBB"/>
+                </a:solidFill>
+                <a:latin typeface="Calibri"/>
+              </a:defRPr>
+            </a:pPr>
+            <a:r>
+              <a:t>  Databricks Components:</a:t>
+            </a:r>
+          </a:p>
+          <a:p>
+            <a:pPr>
+              <a:spcAft>
+                <a:spcPts val="600"/>
+              </a:spcAft>
+              <a:defRPr sz="1200">
+                <a:solidFill>
+                  <a:srgbClr val="BBBBBB"/>
+                </a:solidFill>
+                <a:latin typeface="Calibri"/>
+              </a:defRPr>
+            </a:pPr>
+            <a:r>
+              <a:t>    Genie Space: CDK Lending Analytics</a:t>
+            </a:r>
+          </a:p>
+          <a:p>
+            <a:pPr>
+              <a:spcAft>
+                <a:spcPts val="600"/>
+              </a:spcAft>
+              <a:defRPr sz="1200">
+                <a:solidFill>
+                  <a:srgbClr val="BBBBBB"/>
+                </a:solidFill>
+                <a:latin typeface="Calibri"/>
+              </a:defRPr>
+            </a:pPr>
+            <a:r>
+              <a:t>    MAS: CDK Lending Supervisor</a:t>
+            </a:r>
+          </a:p>
+          <a:p>
+            <a:pPr>
+              <a:spcAft>
+                <a:spcPts val="600"/>
+              </a:spcAft>
+              <a:defRPr sz="1200">
+                <a:solidFill>
+                  <a:srgbClr val="BBBBBB"/>
+                </a:solidFill>
+                <a:latin typeface="Calibri"/>
+              </a:defRPr>
+            </a:pPr>
+            <a:r>
+              <a:t>    Model Serving Endpoint (custom agent)</a:t>
             </a:r>
           </a:p>
         </p:txBody>
@@ -9168,6 +8459,1542 @@
 </file>
 
 <file path=ppt/slides/slide16.xml><?xml version="1.0" encoding="utf-8"?>
+<p:sld xmlns:a="http://schemas.openxmlformats.org/drawingml/2006/main" xmlns:p="http://schemas.openxmlformats.org/presentationml/2006/main" xmlns:r="http://schemas.openxmlformats.org/officeDocument/2006/relationships">
+  <p:cSld>
+    <p:bg>
+      <p:bgPr>
+        <a:solidFill>
+          <a:srgbClr val="1B1F23"/>
+        </a:solidFill>
+        <a:effectLst/>
+      </p:bgPr>
+    </p:bg>
+    <p:spTree>
+      <p:nvGrpSpPr>
+        <p:cNvPr id="1" name=""/>
+        <p:cNvGrpSpPr/>
+        <p:nvPr/>
+      </p:nvGrpSpPr>
+      <p:grpSpPr/>
+      <p:sp>
+        <p:nvSpPr>
+          <p:cNvPr id="2" name="Rectangle 1"/>
+          <p:cNvSpPr/>
+          <p:nvPr/>
+        </p:nvSpPr>
+        <p:spPr>
+          <a:xfrm>
+            <a:off x="548640" y="1463040"/>
+            <a:ext cx="73152" cy="731520"/>
+          </a:xfrm>
+          <a:prstGeom prst="rect">
+            <a:avLst/>
+          </a:prstGeom>
+          <a:solidFill>
+            <a:srgbClr val="FF3821"/>
+          </a:solidFill>
+          <a:ln>
+            <a:noFill/>
+          </a:ln>
+        </p:spPr>
+        <p:style>
+          <a:lnRef idx="1">
+            <a:schemeClr val="accent1"/>
+          </a:lnRef>
+          <a:fillRef idx="3">
+            <a:schemeClr val="accent1"/>
+          </a:fillRef>
+          <a:effectRef idx="2">
+            <a:schemeClr val="accent1"/>
+          </a:effectRef>
+          <a:fontRef idx="minor">
+            <a:schemeClr val="lt1"/>
+          </a:fontRef>
+        </p:style>
+        <p:txBody>
+          <a:bodyPr rtlCol="0" anchor="ctr"/>
+          <a:lstStyle/>
+          <a:p>
+            <a:pPr algn="ctr"/>
+          </a:p>
+        </p:txBody>
+      </p:sp>
+      <p:sp>
+        <p:nvSpPr>
+          <p:cNvPr id="3" name="TextBox 2"/>
+          <p:cNvSpPr txBox="1"/>
+          <p:nvPr/>
+        </p:nvSpPr>
+        <p:spPr>
+          <a:xfrm>
+            <a:off x="822960" y="1371600"/>
+            <a:ext cx="10058400" cy="914400"/>
+          </a:xfrm>
+          <a:prstGeom prst="rect">
+            <a:avLst/>
+          </a:prstGeom>
+          <a:noFill/>
+        </p:spPr>
+        <p:txBody>
+          <a:bodyPr wrap="square">
+            <a:spAutoFit/>
+          </a:bodyPr>
+          <a:lstStyle/>
+          <a:p>
+            <a:pPr algn="l">
+              <a:defRPr sz="3600" b="1">
+                <a:solidFill>
+                  <a:srgbClr val="FFFFFF"/>
+                </a:solidFill>
+                <a:latin typeface="Calibri"/>
+              </a:defRPr>
+            </a:pPr>
+            <a:r>
+              <a:t>Architecture Summary</a:t>
+            </a:r>
+          </a:p>
+        </p:txBody>
+      </p:sp>
+      <p:sp>
+        <p:nvSpPr>
+          <p:cNvPr id="4" name="Rounded Rectangle 3"/>
+          <p:cNvSpPr/>
+          <p:nvPr/>
+        </p:nvSpPr>
+        <p:spPr>
+          <a:xfrm>
+            <a:off x="731520" y="2926080"/>
+            <a:ext cx="10698480" cy="384048"/>
+          </a:xfrm>
+          <a:prstGeom prst="roundRect">
+            <a:avLst/>
+          </a:prstGeom>
+          <a:solidFill>
+            <a:srgbClr val="252A30"/>
+          </a:solidFill>
+          <a:ln>
+            <a:noFill/>
+          </a:ln>
+          <a:effectLst/>
+        </p:spPr>
+        <p:style>
+          <a:lnRef idx="1">
+            <a:schemeClr val="accent1"/>
+          </a:lnRef>
+          <a:fillRef idx="3">
+            <a:schemeClr val="accent1"/>
+          </a:fillRef>
+          <a:effectRef idx="2">
+            <a:schemeClr val="accent1"/>
+          </a:effectRef>
+          <a:fontRef idx="minor">
+            <a:schemeClr val="lt1"/>
+          </a:fontRef>
+        </p:style>
+        <p:txBody>
+          <a:bodyPr rtlCol="0" anchor="ctr"/>
+          <a:lstStyle/>
+          <a:p>
+            <a:pPr algn="ctr"/>
+          </a:p>
+        </p:txBody>
+      </p:sp>
+      <p:sp>
+        <p:nvSpPr>
+          <p:cNvPr id="5" name="Rectangle 4"/>
+          <p:cNvSpPr/>
+          <p:nvPr/>
+        </p:nvSpPr>
+        <p:spPr>
+          <a:xfrm>
+            <a:off x="914400" y="2980944"/>
+            <a:ext cx="45720" cy="274320"/>
+          </a:xfrm>
+          <a:prstGeom prst="rect">
+            <a:avLst/>
+          </a:prstGeom>
+          <a:solidFill>
+            <a:srgbClr val="FF3821"/>
+          </a:solidFill>
+          <a:ln>
+            <a:noFill/>
+          </a:ln>
+        </p:spPr>
+        <p:style>
+          <a:lnRef idx="1">
+            <a:schemeClr val="accent1"/>
+          </a:lnRef>
+          <a:fillRef idx="3">
+            <a:schemeClr val="accent1"/>
+          </a:fillRef>
+          <a:effectRef idx="2">
+            <a:schemeClr val="accent1"/>
+          </a:effectRef>
+          <a:fontRef idx="minor">
+            <a:schemeClr val="lt1"/>
+          </a:fontRef>
+        </p:style>
+        <p:txBody>
+          <a:bodyPr rtlCol="0" anchor="ctr"/>
+          <a:lstStyle/>
+          <a:p>
+            <a:pPr algn="ctr"/>
+          </a:p>
+        </p:txBody>
+      </p:sp>
+      <p:sp>
+        <p:nvSpPr>
+          <p:cNvPr id="6" name="TextBox 5"/>
+          <p:cNvSpPr txBox="1"/>
+          <p:nvPr/>
+        </p:nvSpPr>
+        <p:spPr>
+          <a:xfrm>
+            <a:off x="1188720" y="2944368"/>
+            <a:ext cx="3200400" cy="347472"/>
+          </a:xfrm>
+          <a:prstGeom prst="rect">
+            <a:avLst/>
+          </a:prstGeom>
+          <a:noFill/>
+        </p:spPr>
+        <p:txBody>
+          <a:bodyPr wrap="square">
+            <a:spAutoFit/>
+          </a:bodyPr>
+          <a:lstStyle/>
+          <a:p>
+            <a:pPr algn="l">
+              <a:defRPr sz="1400" b="1">
+                <a:solidFill>
+                  <a:srgbClr val="FFFFFF"/>
+                </a:solidFill>
+                <a:latin typeface="Calibri"/>
+              </a:defRPr>
+            </a:pPr>
+            <a:r>
+              <a:t>Data Ingestion</a:t>
+            </a:r>
+          </a:p>
+        </p:txBody>
+      </p:sp>
+      <p:sp>
+        <p:nvSpPr>
+          <p:cNvPr id="7" name="TextBox 6"/>
+          <p:cNvSpPr txBox="1"/>
+          <p:nvPr/>
+        </p:nvSpPr>
+        <p:spPr>
+          <a:xfrm>
+            <a:off x="4572000" y="2944368"/>
+            <a:ext cx="6583680" cy="347472"/>
+          </a:xfrm>
+          <a:prstGeom prst="rect">
+            <a:avLst/>
+          </a:prstGeom>
+          <a:noFill/>
+        </p:spPr>
+        <p:txBody>
+          <a:bodyPr wrap="square">
+            <a:spAutoFit/>
+          </a:bodyPr>
+          <a:lstStyle/>
+          <a:p>
+            <a:pPr algn="l">
+              <a:defRPr sz="1300" b="0">
+                <a:solidFill>
+                  <a:srgbClr val="BBBBBB"/>
+                </a:solidFill>
+                <a:latin typeface="Calibri"/>
+              </a:defRPr>
+            </a:pPr>
+            <a:r>
+              <a:t>Auto Loader, ai_parse_document, ai_query</a:t>
+            </a:r>
+          </a:p>
+        </p:txBody>
+      </p:sp>
+      <p:sp>
+        <p:nvSpPr>
+          <p:cNvPr id="8" name="Rounded Rectangle 7"/>
+          <p:cNvSpPr/>
+          <p:nvPr/>
+        </p:nvSpPr>
+        <p:spPr>
+          <a:xfrm>
+            <a:off x="731520" y="3346704"/>
+            <a:ext cx="10698480" cy="384048"/>
+          </a:xfrm>
+          <a:prstGeom prst="roundRect">
+            <a:avLst/>
+          </a:prstGeom>
+          <a:solidFill>
+            <a:srgbClr val="252A30"/>
+          </a:solidFill>
+          <a:ln>
+            <a:noFill/>
+          </a:ln>
+          <a:effectLst/>
+        </p:spPr>
+        <p:style>
+          <a:lnRef idx="1">
+            <a:schemeClr val="accent1"/>
+          </a:lnRef>
+          <a:fillRef idx="3">
+            <a:schemeClr val="accent1"/>
+          </a:fillRef>
+          <a:effectRef idx="2">
+            <a:schemeClr val="accent1"/>
+          </a:effectRef>
+          <a:fontRef idx="minor">
+            <a:schemeClr val="lt1"/>
+          </a:fontRef>
+        </p:style>
+        <p:txBody>
+          <a:bodyPr rtlCol="0" anchor="ctr"/>
+          <a:lstStyle/>
+          <a:p>
+            <a:pPr algn="ctr"/>
+          </a:p>
+        </p:txBody>
+      </p:sp>
+      <p:sp>
+        <p:nvSpPr>
+          <p:cNvPr id="9" name="Rectangle 8"/>
+          <p:cNvSpPr/>
+          <p:nvPr/>
+        </p:nvSpPr>
+        <p:spPr>
+          <a:xfrm>
+            <a:off x="914400" y="3401568"/>
+            <a:ext cx="45720" cy="274320"/>
+          </a:xfrm>
+          <a:prstGeom prst="rect">
+            <a:avLst/>
+          </a:prstGeom>
+          <a:solidFill>
+            <a:srgbClr val="FFB72B"/>
+          </a:solidFill>
+          <a:ln>
+            <a:noFill/>
+          </a:ln>
+        </p:spPr>
+        <p:style>
+          <a:lnRef idx="1">
+            <a:schemeClr val="accent1"/>
+          </a:lnRef>
+          <a:fillRef idx="3">
+            <a:schemeClr val="accent1"/>
+          </a:fillRef>
+          <a:effectRef idx="2">
+            <a:schemeClr val="accent1"/>
+          </a:effectRef>
+          <a:fontRef idx="minor">
+            <a:schemeClr val="lt1"/>
+          </a:fontRef>
+        </p:style>
+        <p:txBody>
+          <a:bodyPr rtlCol="0" anchor="ctr"/>
+          <a:lstStyle/>
+          <a:p>
+            <a:pPr algn="ctr"/>
+          </a:p>
+        </p:txBody>
+      </p:sp>
+      <p:sp>
+        <p:nvSpPr>
+          <p:cNvPr id="10" name="TextBox 9"/>
+          <p:cNvSpPr txBox="1"/>
+          <p:nvPr/>
+        </p:nvSpPr>
+        <p:spPr>
+          <a:xfrm>
+            <a:off x="1188720" y="3364992"/>
+            <a:ext cx="3200400" cy="347472"/>
+          </a:xfrm>
+          <a:prstGeom prst="rect">
+            <a:avLst/>
+          </a:prstGeom>
+          <a:noFill/>
+        </p:spPr>
+        <p:txBody>
+          <a:bodyPr wrap="square">
+            <a:spAutoFit/>
+          </a:bodyPr>
+          <a:lstStyle/>
+          <a:p>
+            <a:pPr algn="l">
+              <a:defRPr sz="1400" b="1">
+                <a:solidFill>
+                  <a:srgbClr val="FFFFFF"/>
+                </a:solidFill>
+                <a:latin typeface="Calibri"/>
+              </a:defRPr>
+            </a:pPr>
+            <a:r>
+              <a:t>Data Pipeline</a:t>
+            </a:r>
+          </a:p>
+        </p:txBody>
+      </p:sp>
+      <p:sp>
+        <p:nvSpPr>
+          <p:cNvPr id="11" name="TextBox 10"/>
+          <p:cNvSpPr txBox="1"/>
+          <p:nvPr/>
+        </p:nvSpPr>
+        <p:spPr>
+          <a:xfrm>
+            <a:off x="4572000" y="3364992"/>
+            <a:ext cx="6583680" cy="347472"/>
+          </a:xfrm>
+          <a:prstGeom prst="rect">
+            <a:avLst/>
+          </a:prstGeom>
+          <a:noFill/>
+        </p:spPr>
+        <p:txBody>
+          <a:bodyPr wrap="square">
+            <a:spAutoFit/>
+          </a:bodyPr>
+          <a:lstStyle/>
+          <a:p>
+            <a:pPr algn="l">
+              <a:defRPr sz="1300" b="0">
+                <a:solidFill>
+                  <a:srgbClr val="BBBBBB"/>
+                </a:solidFill>
+                <a:latin typeface="Calibri"/>
+              </a:defRPr>
+            </a:pPr>
+            <a:r>
+              <a:t>Spark Declarative Pipeline (Bronze/Silver/Gold)</a:t>
+            </a:r>
+          </a:p>
+        </p:txBody>
+      </p:sp>
+      <p:sp>
+        <p:nvSpPr>
+          <p:cNvPr id="12" name="Rounded Rectangle 11"/>
+          <p:cNvSpPr/>
+          <p:nvPr/>
+        </p:nvSpPr>
+        <p:spPr>
+          <a:xfrm>
+            <a:off x="731520" y="3767328"/>
+            <a:ext cx="10698480" cy="384048"/>
+          </a:xfrm>
+          <a:prstGeom prst="roundRect">
+            <a:avLst/>
+          </a:prstGeom>
+          <a:solidFill>
+            <a:srgbClr val="252A30"/>
+          </a:solidFill>
+          <a:ln>
+            <a:noFill/>
+          </a:ln>
+          <a:effectLst/>
+        </p:spPr>
+        <p:style>
+          <a:lnRef idx="1">
+            <a:schemeClr val="accent1"/>
+          </a:lnRef>
+          <a:fillRef idx="3">
+            <a:schemeClr val="accent1"/>
+          </a:fillRef>
+          <a:effectRef idx="2">
+            <a:schemeClr val="accent1"/>
+          </a:effectRef>
+          <a:fontRef idx="minor">
+            <a:schemeClr val="lt1"/>
+          </a:fontRef>
+        </p:style>
+        <p:txBody>
+          <a:bodyPr rtlCol="0" anchor="ctr"/>
+          <a:lstStyle/>
+          <a:p>
+            <a:pPr algn="ctr"/>
+          </a:p>
+        </p:txBody>
+      </p:sp>
+      <p:sp>
+        <p:nvSpPr>
+          <p:cNvPr id="13" name="Rectangle 12"/>
+          <p:cNvSpPr/>
+          <p:nvPr/>
+        </p:nvSpPr>
+        <p:spPr>
+          <a:xfrm>
+            <a:off x="914400" y="3822192"/>
+            <a:ext cx="45720" cy="274320"/>
+          </a:xfrm>
+          <a:prstGeom prst="rect">
+            <a:avLst/>
+          </a:prstGeom>
+          <a:solidFill>
+            <a:srgbClr val="42A5F5"/>
+          </a:solidFill>
+          <a:ln>
+            <a:noFill/>
+          </a:ln>
+        </p:spPr>
+        <p:style>
+          <a:lnRef idx="1">
+            <a:schemeClr val="accent1"/>
+          </a:lnRef>
+          <a:fillRef idx="3">
+            <a:schemeClr val="accent1"/>
+          </a:fillRef>
+          <a:effectRef idx="2">
+            <a:schemeClr val="accent1"/>
+          </a:effectRef>
+          <a:fontRef idx="minor">
+            <a:schemeClr val="lt1"/>
+          </a:fontRef>
+        </p:style>
+        <p:txBody>
+          <a:bodyPr rtlCol="0" anchor="ctr"/>
+          <a:lstStyle/>
+          <a:p>
+            <a:pPr algn="ctr"/>
+          </a:p>
+        </p:txBody>
+      </p:sp>
+      <p:sp>
+        <p:nvSpPr>
+          <p:cNvPr id="14" name="TextBox 13"/>
+          <p:cNvSpPr txBox="1"/>
+          <p:nvPr/>
+        </p:nvSpPr>
+        <p:spPr>
+          <a:xfrm>
+            <a:off x="1188720" y="3785616"/>
+            <a:ext cx="3200400" cy="347472"/>
+          </a:xfrm>
+          <a:prstGeom prst="rect">
+            <a:avLst/>
+          </a:prstGeom>
+          <a:noFill/>
+        </p:spPr>
+        <p:txBody>
+          <a:bodyPr wrap="square">
+            <a:spAutoFit/>
+          </a:bodyPr>
+          <a:lstStyle/>
+          <a:p>
+            <a:pPr algn="l">
+              <a:defRPr sz="1400" b="1">
+                <a:solidFill>
+                  <a:srgbClr val="FFFFFF"/>
+                </a:solidFill>
+                <a:latin typeface="Calibri"/>
+              </a:defRPr>
+            </a:pPr>
+            <a:r>
+              <a:t>Feature Store</a:t>
+            </a:r>
+          </a:p>
+        </p:txBody>
+      </p:sp>
+      <p:sp>
+        <p:nvSpPr>
+          <p:cNvPr id="15" name="TextBox 14"/>
+          <p:cNvSpPr txBox="1"/>
+          <p:nvPr/>
+        </p:nvSpPr>
+        <p:spPr>
+          <a:xfrm>
+            <a:off x="4572000" y="3785616"/>
+            <a:ext cx="6583680" cy="347472"/>
+          </a:xfrm>
+          <a:prstGeom prst="rect">
+            <a:avLst/>
+          </a:prstGeom>
+          <a:noFill/>
+        </p:spPr>
+        <p:txBody>
+          <a:bodyPr wrap="square">
+            <a:spAutoFit/>
+          </a:bodyPr>
+          <a:lstStyle/>
+          <a:p>
+            <a:pPr algn="l">
+              <a:defRPr sz="1300" b="0">
+                <a:solidFill>
+                  <a:srgbClr val="BBBBBB"/>
+                </a:solidFill>
+                <a:latin typeface="Calibri"/>
+              </a:defRPr>
+            </a:pPr>
+            <a:r>
+              <a:t>Feature table + on-demand UC functions</a:t>
+            </a:r>
+          </a:p>
+        </p:txBody>
+      </p:sp>
+      <p:sp>
+        <p:nvSpPr>
+          <p:cNvPr id="16" name="Rounded Rectangle 15"/>
+          <p:cNvSpPr/>
+          <p:nvPr/>
+        </p:nvSpPr>
+        <p:spPr>
+          <a:xfrm>
+            <a:off x="731520" y="4187952"/>
+            <a:ext cx="10698480" cy="384048"/>
+          </a:xfrm>
+          <a:prstGeom prst="roundRect">
+            <a:avLst/>
+          </a:prstGeom>
+          <a:solidFill>
+            <a:srgbClr val="252A30"/>
+          </a:solidFill>
+          <a:ln>
+            <a:noFill/>
+          </a:ln>
+          <a:effectLst/>
+        </p:spPr>
+        <p:style>
+          <a:lnRef idx="1">
+            <a:schemeClr val="accent1"/>
+          </a:lnRef>
+          <a:fillRef idx="3">
+            <a:schemeClr val="accent1"/>
+          </a:fillRef>
+          <a:effectRef idx="2">
+            <a:schemeClr val="accent1"/>
+          </a:effectRef>
+          <a:fontRef idx="minor">
+            <a:schemeClr val="lt1"/>
+          </a:fontRef>
+        </p:style>
+        <p:txBody>
+          <a:bodyPr rtlCol="0" anchor="ctr"/>
+          <a:lstStyle/>
+          <a:p>
+            <a:pPr algn="ctr"/>
+          </a:p>
+        </p:txBody>
+      </p:sp>
+      <p:sp>
+        <p:nvSpPr>
+          <p:cNvPr id="17" name="Rectangle 16"/>
+          <p:cNvSpPr/>
+          <p:nvPr/>
+        </p:nvSpPr>
+        <p:spPr>
+          <a:xfrm>
+            <a:off x="914400" y="4242816"/>
+            <a:ext cx="45720" cy="274320"/>
+          </a:xfrm>
+          <a:prstGeom prst="rect">
+            <a:avLst/>
+          </a:prstGeom>
+          <a:solidFill>
+            <a:srgbClr val="00C853"/>
+          </a:solidFill>
+          <a:ln>
+            <a:noFill/>
+          </a:ln>
+        </p:spPr>
+        <p:style>
+          <a:lnRef idx="1">
+            <a:schemeClr val="accent1"/>
+          </a:lnRef>
+          <a:fillRef idx="3">
+            <a:schemeClr val="accent1"/>
+          </a:fillRef>
+          <a:effectRef idx="2">
+            <a:schemeClr val="accent1"/>
+          </a:effectRef>
+          <a:fontRef idx="minor">
+            <a:schemeClr val="lt1"/>
+          </a:fontRef>
+        </p:style>
+        <p:txBody>
+          <a:bodyPr rtlCol="0" anchor="ctr"/>
+          <a:lstStyle/>
+          <a:p>
+            <a:pPr algn="ctr"/>
+          </a:p>
+        </p:txBody>
+      </p:sp>
+      <p:sp>
+        <p:nvSpPr>
+          <p:cNvPr id="18" name="TextBox 17"/>
+          <p:cNvSpPr txBox="1"/>
+          <p:nvPr/>
+        </p:nvSpPr>
+        <p:spPr>
+          <a:xfrm>
+            <a:off x="1188720" y="4206240"/>
+            <a:ext cx="3200400" cy="347472"/>
+          </a:xfrm>
+          <a:prstGeom prst="rect">
+            <a:avLst/>
+          </a:prstGeom>
+          <a:noFill/>
+        </p:spPr>
+        <p:txBody>
+          <a:bodyPr wrap="square">
+            <a:spAutoFit/>
+          </a:bodyPr>
+          <a:lstStyle/>
+          <a:p>
+            <a:pPr algn="l">
+              <a:defRPr sz="1400" b="1">
+                <a:solidFill>
+                  <a:srgbClr val="FFFFFF"/>
+                </a:solidFill>
+                <a:latin typeface="Calibri"/>
+              </a:defRPr>
+            </a:pPr>
+            <a:r>
+              <a:t>ML Training</a:t>
+            </a:r>
+          </a:p>
+        </p:txBody>
+      </p:sp>
+      <p:sp>
+        <p:nvSpPr>
+          <p:cNvPr id="19" name="TextBox 18"/>
+          <p:cNvSpPr txBox="1"/>
+          <p:nvPr/>
+        </p:nvSpPr>
+        <p:spPr>
+          <a:xfrm>
+            <a:off x="4572000" y="4206240"/>
+            <a:ext cx="6583680" cy="347472"/>
+          </a:xfrm>
+          <a:prstGeom prst="rect">
+            <a:avLst/>
+          </a:prstGeom>
+          <a:noFill/>
+        </p:spPr>
+        <p:txBody>
+          <a:bodyPr wrap="square">
+            <a:spAutoFit/>
+          </a:bodyPr>
+          <a:lstStyle/>
+          <a:p>
+            <a:pPr algn="l">
+              <a:defRPr sz="1300" b="0">
+                <a:solidFill>
+                  <a:srgbClr val="BBBBBB"/>
+                </a:solidFill>
+                <a:latin typeface="Calibri"/>
+              </a:defRPr>
+            </a:pPr>
+            <a:r>
+              <a:t>Optuna HPO + pyfunc wrapper with business rules</a:t>
+            </a:r>
+          </a:p>
+        </p:txBody>
+      </p:sp>
+      <p:sp>
+        <p:nvSpPr>
+          <p:cNvPr id="20" name="Rounded Rectangle 19"/>
+          <p:cNvSpPr/>
+          <p:nvPr/>
+        </p:nvSpPr>
+        <p:spPr>
+          <a:xfrm>
+            <a:off x="731520" y="4608576"/>
+            <a:ext cx="10698480" cy="384048"/>
+          </a:xfrm>
+          <a:prstGeom prst="roundRect">
+            <a:avLst/>
+          </a:prstGeom>
+          <a:solidFill>
+            <a:srgbClr val="252A30"/>
+          </a:solidFill>
+          <a:ln>
+            <a:noFill/>
+          </a:ln>
+          <a:effectLst/>
+        </p:spPr>
+        <p:style>
+          <a:lnRef idx="1">
+            <a:schemeClr val="accent1"/>
+          </a:lnRef>
+          <a:fillRef idx="3">
+            <a:schemeClr val="accent1"/>
+          </a:fillRef>
+          <a:effectRef idx="2">
+            <a:schemeClr val="accent1"/>
+          </a:effectRef>
+          <a:fontRef idx="minor">
+            <a:schemeClr val="lt1"/>
+          </a:fontRef>
+        </p:style>
+        <p:txBody>
+          <a:bodyPr rtlCol="0" anchor="ctr"/>
+          <a:lstStyle/>
+          <a:p>
+            <a:pPr algn="ctr"/>
+          </a:p>
+        </p:txBody>
+      </p:sp>
+      <p:sp>
+        <p:nvSpPr>
+          <p:cNvPr id="21" name="Rectangle 20"/>
+          <p:cNvSpPr/>
+          <p:nvPr/>
+        </p:nvSpPr>
+        <p:spPr>
+          <a:xfrm>
+            <a:off x="914400" y="4663440"/>
+            <a:ext cx="45720" cy="274320"/>
+          </a:xfrm>
+          <a:prstGeom prst="rect">
+            <a:avLst/>
+          </a:prstGeom>
+          <a:solidFill>
+            <a:srgbClr val="FFFFFF"/>
+          </a:solidFill>
+          <a:ln>
+            <a:noFill/>
+          </a:ln>
+        </p:spPr>
+        <p:style>
+          <a:lnRef idx="1">
+            <a:schemeClr val="accent1"/>
+          </a:lnRef>
+          <a:fillRef idx="3">
+            <a:schemeClr val="accent1"/>
+          </a:fillRef>
+          <a:effectRef idx="2">
+            <a:schemeClr val="accent1"/>
+          </a:effectRef>
+          <a:fontRef idx="minor">
+            <a:schemeClr val="lt1"/>
+          </a:fontRef>
+        </p:style>
+        <p:txBody>
+          <a:bodyPr rtlCol="0" anchor="ctr"/>
+          <a:lstStyle/>
+          <a:p>
+            <a:pPr algn="ctr"/>
+          </a:p>
+        </p:txBody>
+      </p:sp>
+      <p:sp>
+        <p:nvSpPr>
+          <p:cNvPr id="22" name="TextBox 21"/>
+          <p:cNvSpPr txBox="1"/>
+          <p:nvPr/>
+        </p:nvSpPr>
+        <p:spPr>
+          <a:xfrm>
+            <a:off x="1188720" y="4626864"/>
+            <a:ext cx="3200400" cy="347472"/>
+          </a:xfrm>
+          <a:prstGeom prst="rect">
+            <a:avLst/>
+          </a:prstGeom>
+          <a:noFill/>
+        </p:spPr>
+        <p:txBody>
+          <a:bodyPr wrap="square">
+            <a:spAutoFit/>
+          </a:bodyPr>
+          <a:lstStyle/>
+          <a:p>
+            <a:pPr algn="l">
+              <a:defRPr sz="1400" b="1">
+                <a:solidFill>
+                  <a:srgbClr val="FFFFFF"/>
+                </a:solidFill>
+                <a:latin typeface="Calibri"/>
+              </a:defRPr>
+            </a:pPr>
+            <a:r>
+              <a:t>Serving</a:t>
+            </a:r>
+          </a:p>
+        </p:txBody>
+      </p:sp>
+      <p:sp>
+        <p:nvSpPr>
+          <p:cNvPr id="23" name="TextBox 22"/>
+          <p:cNvSpPr txBox="1"/>
+          <p:nvPr/>
+        </p:nvSpPr>
+        <p:spPr>
+          <a:xfrm>
+            <a:off x="4572000" y="4626864"/>
+            <a:ext cx="6583680" cy="347472"/>
+          </a:xfrm>
+          <a:prstGeom prst="rect">
+            <a:avLst/>
+          </a:prstGeom>
+          <a:noFill/>
+        </p:spPr>
+        <p:txBody>
+          <a:bodyPr wrap="square">
+            <a:spAutoFit/>
+          </a:bodyPr>
+          <a:lstStyle/>
+          <a:p>
+            <a:pPr algn="l">
+              <a:defRPr sz="1300" b="0">
+                <a:solidFill>
+                  <a:srgbClr val="BBBBBB"/>
+                </a:solidFill>
+                <a:latin typeface="Calibri"/>
+              </a:defRPr>
+            </a:pPr>
+            <a:r>
+              <a:t>Model Serving endpoint + Online Feature Store</a:t>
+            </a:r>
+          </a:p>
+        </p:txBody>
+      </p:sp>
+      <p:sp>
+        <p:nvSpPr>
+          <p:cNvPr id="24" name="Rounded Rectangle 23"/>
+          <p:cNvSpPr/>
+          <p:nvPr/>
+        </p:nvSpPr>
+        <p:spPr>
+          <a:xfrm>
+            <a:off x="731520" y="5029200"/>
+            <a:ext cx="10698480" cy="384048"/>
+          </a:xfrm>
+          <a:prstGeom prst="roundRect">
+            <a:avLst/>
+          </a:prstGeom>
+          <a:solidFill>
+            <a:srgbClr val="252A30"/>
+          </a:solidFill>
+          <a:ln>
+            <a:noFill/>
+          </a:ln>
+          <a:effectLst/>
+        </p:spPr>
+        <p:style>
+          <a:lnRef idx="1">
+            <a:schemeClr val="accent1"/>
+          </a:lnRef>
+          <a:fillRef idx="3">
+            <a:schemeClr val="accent1"/>
+          </a:fillRef>
+          <a:effectRef idx="2">
+            <a:schemeClr val="accent1"/>
+          </a:effectRef>
+          <a:fontRef idx="minor">
+            <a:schemeClr val="lt1"/>
+          </a:fontRef>
+        </p:style>
+        <p:txBody>
+          <a:bodyPr rtlCol="0" anchor="ctr"/>
+          <a:lstStyle/>
+          <a:p>
+            <a:pPr algn="ctr"/>
+          </a:p>
+        </p:txBody>
+      </p:sp>
+      <p:sp>
+        <p:nvSpPr>
+          <p:cNvPr id="25" name="Rectangle 24"/>
+          <p:cNvSpPr/>
+          <p:nvPr/>
+        </p:nvSpPr>
+        <p:spPr>
+          <a:xfrm>
+            <a:off x="914400" y="5084064"/>
+            <a:ext cx="45720" cy="274320"/>
+          </a:xfrm>
+          <a:prstGeom prst="rect">
+            <a:avLst/>
+          </a:prstGeom>
+          <a:solidFill>
+            <a:srgbClr val="888888"/>
+          </a:solidFill>
+          <a:ln>
+            <a:noFill/>
+          </a:ln>
+        </p:spPr>
+        <p:style>
+          <a:lnRef idx="1">
+            <a:schemeClr val="accent1"/>
+          </a:lnRef>
+          <a:fillRef idx="3">
+            <a:schemeClr val="accent1"/>
+          </a:fillRef>
+          <a:effectRef idx="2">
+            <a:schemeClr val="accent1"/>
+          </a:effectRef>
+          <a:fontRef idx="minor">
+            <a:schemeClr val="lt1"/>
+          </a:fontRef>
+        </p:style>
+        <p:txBody>
+          <a:bodyPr rtlCol="0" anchor="ctr"/>
+          <a:lstStyle/>
+          <a:p>
+            <a:pPr algn="ctr"/>
+          </a:p>
+        </p:txBody>
+      </p:sp>
+      <p:sp>
+        <p:nvSpPr>
+          <p:cNvPr id="26" name="TextBox 25"/>
+          <p:cNvSpPr txBox="1"/>
+          <p:nvPr/>
+        </p:nvSpPr>
+        <p:spPr>
+          <a:xfrm>
+            <a:off x="1188720" y="5047488"/>
+            <a:ext cx="3200400" cy="347472"/>
+          </a:xfrm>
+          <a:prstGeom prst="rect">
+            <a:avLst/>
+          </a:prstGeom>
+          <a:noFill/>
+        </p:spPr>
+        <p:txBody>
+          <a:bodyPr wrap="square">
+            <a:spAutoFit/>
+          </a:bodyPr>
+          <a:lstStyle/>
+          <a:p>
+            <a:pPr algn="l">
+              <a:defRPr sz="1400" b="1">
+                <a:solidFill>
+                  <a:srgbClr val="FFFFFF"/>
+                </a:solidFill>
+                <a:latin typeface="Calibri"/>
+              </a:defRPr>
+            </a:pPr>
+            <a:r>
+              <a:t>Monitoring</a:t>
+            </a:r>
+          </a:p>
+        </p:txBody>
+      </p:sp>
+      <p:sp>
+        <p:nvSpPr>
+          <p:cNvPr id="27" name="TextBox 26"/>
+          <p:cNvSpPr txBox="1"/>
+          <p:nvPr/>
+        </p:nvSpPr>
+        <p:spPr>
+          <a:xfrm>
+            <a:off x="4572000" y="5047488"/>
+            <a:ext cx="6583680" cy="347472"/>
+          </a:xfrm>
+          <a:prstGeom prst="rect">
+            <a:avLst/>
+          </a:prstGeom>
+          <a:noFill/>
+        </p:spPr>
+        <p:txBody>
+          <a:bodyPr wrap="square">
+            <a:spAutoFit/>
+          </a:bodyPr>
+          <a:lstStyle/>
+          <a:p>
+            <a:pPr algn="l">
+              <a:defRPr sz="1300" b="0">
+                <a:solidFill>
+                  <a:srgbClr val="BBBBBB"/>
+                </a:solidFill>
+                <a:latin typeface="Calibri"/>
+              </a:defRPr>
+            </a:pPr>
+            <a:r>
+              <a:t>Lakehouse Monitoring + auto-retrain on drift</a:t>
+            </a:r>
+          </a:p>
+        </p:txBody>
+      </p:sp>
+      <p:sp>
+        <p:nvSpPr>
+          <p:cNvPr id="28" name="Rounded Rectangle 27"/>
+          <p:cNvSpPr/>
+          <p:nvPr/>
+        </p:nvSpPr>
+        <p:spPr>
+          <a:xfrm>
+            <a:off x="731520" y="5449824"/>
+            <a:ext cx="10698480" cy="384048"/>
+          </a:xfrm>
+          <a:prstGeom prst="roundRect">
+            <a:avLst/>
+          </a:prstGeom>
+          <a:solidFill>
+            <a:srgbClr val="252A30"/>
+          </a:solidFill>
+          <a:ln>
+            <a:noFill/>
+          </a:ln>
+          <a:effectLst/>
+        </p:spPr>
+        <p:style>
+          <a:lnRef idx="1">
+            <a:schemeClr val="accent1"/>
+          </a:lnRef>
+          <a:fillRef idx="3">
+            <a:schemeClr val="accent1"/>
+          </a:fillRef>
+          <a:effectRef idx="2">
+            <a:schemeClr val="accent1"/>
+          </a:effectRef>
+          <a:fontRef idx="minor">
+            <a:schemeClr val="lt1"/>
+          </a:fontRef>
+        </p:style>
+        <p:txBody>
+          <a:bodyPr rtlCol="0" anchor="ctr"/>
+          <a:lstStyle/>
+          <a:p>
+            <a:pPr algn="ctr"/>
+          </a:p>
+        </p:txBody>
+      </p:sp>
+      <p:sp>
+        <p:nvSpPr>
+          <p:cNvPr id="29" name="Rectangle 28"/>
+          <p:cNvSpPr/>
+          <p:nvPr/>
+        </p:nvSpPr>
+        <p:spPr>
+          <a:xfrm>
+            <a:off x="914400" y="5504688"/>
+            <a:ext cx="45720" cy="274320"/>
+          </a:xfrm>
+          <a:prstGeom prst="rect">
+            <a:avLst/>
+          </a:prstGeom>
+          <a:solidFill>
+            <a:srgbClr val="42A5F5"/>
+          </a:solidFill>
+          <a:ln>
+            <a:noFill/>
+          </a:ln>
+        </p:spPr>
+        <p:style>
+          <a:lnRef idx="1">
+            <a:schemeClr val="accent1"/>
+          </a:lnRef>
+          <a:fillRef idx="3">
+            <a:schemeClr val="accent1"/>
+          </a:fillRef>
+          <a:effectRef idx="2">
+            <a:schemeClr val="accent1"/>
+          </a:effectRef>
+          <a:fontRef idx="minor">
+            <a:schemeClr val="lt1"/>
+          </a:fontRef>
+        </p:style>
+        <p:txBody>
+          <a:bodyPr rtlCol="0" anchor="ctr"/>
+          <a:lstStyle/>
+          <a:p>
+            <a:pPr algn="ctr"/>
+          </a:p>
+        </p:txBody>
+      </p:sp>
+      <p:sp>
+        <p:nvSpPr>
+          <p:cNvPr id="30" name="TextBox 29"/>
+          <p:cNvSpPr txBox="1"/>
+          <p:nvPr/>
+        </p:nvSpPr>
+        <p:spPr>
+          <a:xfrm>
+            <a:off x="1188720" y="5468112"/>
+            <a:ext cx="3200400" cy="347472"/>
+          </a:xfrm>
+          <a:prstGeom prst="rect">
+            <a:avLst/>
+          </a:prstGeom>
+          <a:noFill/>
+        </p:spPr>
+        <p:txBody>
+          <a:bodyPr wrap="square">
+            <a:spAutoFit/>
+          </a:bodyPr>
+          <a:lstStyle/>
+          <a:p>
+            <a:pPr algn="l">
+              <a:defRPr sz="1400" b="1">
+                <a:solidFill>
+                  <a:srgbClr val="FFFFFF"/>
+                </a:solidFill>
+                <a:latin typeface="Calibri"/>
+              </a:defRPr>
+            </a:pPr>
+            <a:r>
+              <a:t>Analytics</a:t>
+            </a:r>
+          </a:p>
+        </p:txBody>
+      </p:sp>
+      <p:sp>
+        <p:nvSpPr>
+          <p:cNvPr id="31" name="TextBox 30"/>
+          <p:cNvSpPr txBox="1"/>
+          <p:nvPr/>
+        </p:nvSpPr>
+        <p:spPr>
+          <a:xfrm>
+            <a:off x="4572000" y="5468112"/>
+            <a:ext cx="6583680" cy="347472"/>
+          </a:xfrm>
+          <a:prstGeom prst="rect">
+            <a:avLst/>
+          </a:prstGeom>
+          <a:noFill/>
+        </p:spPr>
+        <p:txBody>
+          <a:bodyPr wrap="square">
+            <a:spAutoFit/>
+          </a:bodyPr>
+          <a:lstStyle/>
+          <a:p>
+            <a:pPr algn="l">
+              <a:defRPr sz="1300" b="0">
+                <a:solidFill>
+                  <a:srgbClr val="BBBBBB"/>
+                </a:solidFill>
+                <a:latin typeface="Calibri"/>
+              </a:defRPr>
+            </a:pPr>
+            <a:r>
+              <a:t>Genie Space for self-service SQL</a:t>
+            </a:r>
+          </a:p>
+        </p:txBody>
+      </p:sp>
+      <p:sp>
+        <p:nvSpPr>
+          <p:cNvPr id="32" name="Rounded Rectangle 31"/>
+          <p:cNvSpPr/>
+          <p:nvPr/>
+        </p:nvSpPr>
+        <p:spPr>
+          <a:xfrm>
+            <a:off x="731520" y="5870448"/>
+            <a:ext cx="10698480" cy="384048"/>
+          </a:xfrm>
+          <a:prstGeom prst="roundRect">
+            <a:avLst/>
+          </a:prstGeom>
+          <a:solidFill>
+            <a:srgbClr val="252A30"/>
+          </a:solidFill>
+          <a:ln>
+            <a:noFill/>
+          </a:ln>
+          <a:effectLst/>
+        </p:spPr>
+        <p:style>
+          <a:lnRef idx="1">
+            <a:schemeClr val="accent1"/>
+          </a:lnRef>
+          <a:fillRef idx="3">
+            <a:schemeClr val="accent1"/>
+          </a:fillRef>
+          <a:effectRef idx="2">
+            <a:schemeClr val="accent1"/>
+          </a:effectRef>
+          <a:fontRef idx="minor">
+            <a:schemeClr val="lt1"/>
+          </a:fontRef>
+        </p:style>
+        <p:txBody>
+          <a:bodyPr rtlCol="0" anchor="ctr"/>
+          <a:lstStyle/>
+          <a:p>
+            <a:pPr algn="ctr"/>
+          </a:p>
+        </p:txBody>
+      </p:sp>
+      <p:sp>
+        <p:nvSpPr>
+          <p:cNvPr id="33" name="Rectangle 32"/>
+          <p:cNvSpPr/>
+          <p:nvPr/>
+        </p:nvSpPr>
+        <p:spPr>
+          <a:xfrm>
+            <a:off x="914400" y="5925312"/>
+            <a:ext cx="45720" cy="274320"/>
+          </a:xfrm>
+          <a:prstGeom prst="rect">
+            <a:avLst/>
+          </a:prstGeom>
+          <a:solidFill>
+            <a:srgbClr val="00C853"/>
+          </a:solidFill>
+          <a:ln>
+            <a:noFill/>
+          </a:ln>
+        </p:spPr>
+        <p:style>
+          <a:lnRef idx="1">
+            <a:schemeClr val="accent1"/>
+          </a:lnRef>
+          <a:fillRef idx="3">
+            <a:schemeClr val="accent1"/>
+          </a:fillRef>
+          <a:effectRef idx="2">
+            <a:schemeClr val="accent1"/>
+          </a:effectRef>
+          <a:fontRef idx="minor">
+            <a:schemeClr val="lt1"/>
+          </a:fontRef>
+        </p:style>
+        <p:txBody>
+          <a:bodyPr rtlCol="0" anchor="ctr"/>
+          <a:lstStyle/>
+          <a:p>
+            <a:pPr algn="ctr"/>
+          </a:p>
+        </p:txBody>
+      </p:sp>
+      <p:sp>
+        <p:nvSpPr>
+          <p:cNvPr id="34" name="TextBox 33"/>
+          <p:cNvSpPr txBox="1"/>
+          <p:nvPr/>
+        </p:nvSpPr>
+        <p:spPr>
+          <a:xfrm>
+            <a:off x="1188720" y="5888736"/>
+            <a:ext cx="3200400" cy="347472"/>
+          </a:xfrm>
+          <a:prstGeom prst="rect">
+            <a:avLst/>
+          </a:prstGeom>
+          <a:noFill/>
+        </p:spPr>
+        <p:txBody>
+          <a:bodyPr wrap="square">
+            <a:spAutoFit/>
+          </a:bodyPr>
+          <a:lstStyle/>
+          <a:p>
+            <a:pPr algn="l">
+              <a:defRPr sz="1400" b="1">
+                <a:solidFill>
+                  <a:srgbClr val="FFFFFF"/>
+                </a:solidFill>
+                <a:latin typeface="Calibri"/>
+              </a:defRPr>
+            </a:pPr>
+            <a:r>
+              <a:t>Rate Shopping</a:t>
+            </a:r>
+          </a:p>
+        </p:txBody>
+      </p:sp>
+      <p:sp>
+        <p:nvSpPr>
+          <p:cNvPr id="35" name="TextBox 34"/>
+          <p:cNvSpPr txBox="1"/>
+          <p:nvPr/>
+        </p:nvSpPr>
+        <p:spPr>
+          <a:xfrm>
+            <a:off x="4572000" y="5888736"/>
+            <a:ext cx="6583680" cy="347472"/>
+          </a:xfrm>
+          <a:prstGeom prst="rect">
+            <a:avLst/>
+          </a:prstGeom>
+          <a:noFill/>
+        </p:spPr>
+        <p:txBody>
+          <a:bodyPr wrap="square">
+            <a:spAutoFit/>
+          </a:bodyPr>
+          <a:lstStyle/>
+          <a:p>
+            <a:pPr algn="l">
+              <a:defRPr sz="1300" b="0">
+                <a:solidFill>
+                  <a:srgbClr val="BBBBBB"/>
+                </a:solidFill>
+                <a:latin typeface="Calibri"/>
+              </a:defRPr>
+            </a:pPr>
+            <a:r>
+              <a:t>ResponsesAgent + LangGraph + UC Functions</a:t>
+            </a:r>
+          </a:p>
+        </p:txBody>
+      </p:sp>
+      <p:sp>
+        <p:nvSpPr>
+          <p:cNvPr id="36" name="Rounded Rectangle 35"/>
+          <p:cNvSpPr/>
+          <p:nvPr/>
+        </p:nvSpPr>
+        <p:spPr>
+          <a:xfrm>
+            <a:off x="731520" y="6291072"/>
+            <a:ext cx="10698480" cy="384048"/>
+          </a:xfrm>
+          <a:prstGeom prst="roundRect">
+            <a:avLst/>
+          </a:prstGeom>
+          <a:solidFill>
+            <a:srgbClr val="252A30"/>
+          </a:solidFill>
+          <a:ln>
+            <a:noFill/>
+          </a:ln>
+          <a:effectLst/>
+        </p:spPr>
+        <p:style>
+          <a:lnRef idx="1">
+            <a:schemeClr val="accent1"/>
+          </a:lnRef>
+          <a:fillRef idx="3">
+            <a:schemeClr val="accent1"/>
+          </a:fillRef>
+          <a:effectRef idx="2">
+            <a:schemeClr val="accent1"/>
+          </a:effectRef>
+          <a:fontRef idx="minor">
+            <a:schemeClr val="lt1"/>
+          </a:fontRef>
+        </p:style>
+        <p:txBody>
+          <a:bodyPr rtlCol="0" anchor="ctr"/>
+          <a:lstStyle/>
+          <a:p>
+            <a:pPr algn="ctr"/>
+          </a:p>
+        </p:txBody>
+      </p:sp>
+      <p:sp>
+        <p:nvSpPr>
+          <p:cNvPr id="37" name="Rectangle 36"/>
+          <p:cNvSpPr/>
+          <p:nvPr/>
+        </p:nvSpPr>
+        <p:spPr>
+          <a:xfrm>
+            <a:off x="914400" y="6345936"/>
+            <a:ext cx="45720" cy="274320"/>
+          </a:xfrm>
+          <a:prstGeom prst="rect">
+            <a:avLst/>
+          </a:prstGeom>
+          <a:solidFill>
+            <a:srgbClr val="FF3821"/>
+          </a:solidFill>
+          <a:ln>
+            <a:noFill/>
+          </a:ln>
+        </p:spPr>
+        <p:style>
+          <a:lnRef idx="1">
+            <a:schemeClr val="accent1"/>
+          </a:lnRef>
+          <a:fillRef idx="3">
+            <a:schemeClr val="accent1"/>
+          </a:fillRef>
+          <a:effectRef idx="2">
+            <a:schemeClr val="accent1"/>
+          </a:effectRef>
+          <a:fontRef idx="minor">
+            <a:schemeClr val="lt1"/>
+          </a:fontRef>
+        </p:style>
+        <p:txBody>
+          <a:bodyPr rtlCol="0" anchor="ctr"/>
+          <a:lstStyle/>
+          <a:p>
+            <a:pPr algn="ctr"/>
+          </a:p>
+        </p:txBody>
+      </p:sp>
+      <p:sp>
+        <p:nvSpPr>
+          <p:cNvPr id="38" name="TextBox 37"/>
+          <p:cNvSpPr txBox="1"/>
+          <p:nvPr/>
+        </p:nvSpPr>
+        <p:spPr>
+          <a:xfrm>
+            <a:off x="1188720" y="6309360"/>
+            <a:ext cx="3200400" cy="347472"/>
+          </a:xfrm>
+          <a:prstGeom prst="rect">
+            <a:avLst/>
+          </a:prstGeom>
+          <a:noFill/>
+        </p:spPr>
+        <p:txBody>
+          <a:bodyPr wrap="square">
+            <a:spAutoFit/>
+          </a:bodyPr>
+          <a:lstStyle/>
+          <a:p>
+            <a:pPr algn="l">
+              <a:defRPr sz="1400" b="1">
+                <a:solidFill>
+                  <a:srgbClr val="FFFFFF"/>
+                </a:solidFill>
+                <a:latin typeface="Calibri"/>
+              </a:defRPr>
+            </a:pPr>
+            <a:r>
+              <a:t>Orchestration</a:t>
+            </a:r>
+          </a:p>
+        </p:txBody>
+      </p:sp>
+      <p:sp>
+        <p:nvSpPr>
+          <p:cNvPr id="39" name="TextBox 38"/>
+          <p:cNvSpPr txBox="1"/>
+          <p:nvPr/>
+        </p:nvSpPr>
+        <p:spPr>
+          <a:xfrm>
+            <a:off x="4572000" y="6309360"/>
+            <a:ext cx="6583680" cy="347472"/>
+          </a:xfrm>
+          <a:prstGeom prst="rect">
+            <a:avLst/>
+          </a:prstGeom>
+          <a:noFill/>
+        </p:spPr>
+        <p:txBody>
+          <a:bodyPr wrap="square">
+            <a:spAutoFit/>
+          </a:bodyPr>
+          <a:lstStyle/>
+          <a:p>
+            <a:pPr algn="l">
+              <a:defRPr sz="1300" b="0">
+                <a:solidFill>
+                  <a:srgbClr val="BBBBBB"/>
+                </a:solidFill>
+                <a:latin typeface="Calibri"/>
+              </a:defRPr>
+            </a:pPr>
+            <a:r>
+              <a:t>Multi-Agent Supervisor (MAS)</a:t>
+            </a:r>
+          </a:p>
+        </p:txBody>
+      </p:sp>
+    </p:spTree>
+  </p:cSld>
+  <p:clrMapOvr>
+    <a:masterClrMapping/>
+  </p:clrMapOvr>
+</p:sld>
+</file>
+
+<file path=ppt/slides/slide17.xml><?xml version="1.0" encoding="utf-8"?>
 <p:sld xmlns:a="http://schemas.openxmlformats.org/drawingml/2006/main" xmlns:p="http://schemas.openxmlformats.org/presentationml/2006/main" xmlns:r="http://schemas.openxmlformats.org/officeDocument/2006/relationships">
   <p:cSld>
     <p:bg>
